--- a/topic00-induction/unit-1/talk-1/a-intro-to-programming.pptx
+++ b/topic00-induction/unit-1/talk-1/a-intro-to-programming.pptx
@@ -5,24 +5,22 @@
     <p:sldMasterId id="2147484046" r:id="rId1"/>
   </p:sldMasterIdLst>
   <p:notesMasterIdLst>
-    <p:notesMasterId r:id="rId17"/>
+    <p:notesMasterId r:id="rId15"/>
   </p:notesMasterIdLst>
   <p:sldIdLst>
     <p:sldId id="256" r:id="rId2"/>
     <p:sldId id="282" r:id="rId3"/>
     <p:sldId id="283" r:id="rId4"/>
-    <p:sldId id="295" r:id="rId5"/>
-    <p:sldId id="323" r:id="rId6"/>
-    <p:sldId id="293" r:id="rId7"/>
-    <p:sldId id="287" r:id="rId8"/>
-    <p:sldId id="291" r:id="rId9"/>
-    <p:sldId id="294" r:id="rId10"/>
-    <p:sldId id="321" r:id="rId11"/>
-    <p:sldId id="322" r:id="rId12"/>
-    <p:sldId id="259" r:id="rId13"/>
-    <p:sldId id="266" r:id="rId14"/>
-    <p:sldId id="311" r:id="rId15"/>
-    <p:sldId id="281" r:id="rId16"/>
+    <p:sldId id="323" r:id="rId5"/>
+    <p:sldId id="293" r:id="rId6"/>
+    <p:sldId id="287" r:id="rId7"/>
+    <p:sldId id="291" r:id="rId8"/>
+    <p:sldId id="294" r:id="rId9"/>
+    <p:sldId id="321" r:id="rId10"/>
+    <p:sldId id="324" r:id="rId11"/>
+    <p:sldId id="259" r:id="rId12"/>
+    <p:sldId id="325" r:id="rId13"/>
+    <p:sldId id="281" r:id="rId14"/>
   </p:sldIdLst>
   <p:sldSz cx="12192000" cy="6858000"/>
   <p:notesSz cx="6858000" cy="9144000"/>
@@ -10788,7 +10786,7 @@
           <a:p>
             <a:fld id="{58C3D141-1E1C-433C-AD3A-CD56CBBB4F9F}" type="datetimeFigureOut">
               <a:rPr lang="en-IE" smtClean="0"/>
-              <a:t>03/09/2025</a:t>
+              <a:t>09/09/2025</a:t>
             </a:fld>
             <a:endParaRPr lang="en-IE"/>
           </a:p>
@@ -11105,10 +11103,7 @@
           <a:bodyPr/>
           <a:lstStyle/>
           <a:p>
-            <a:r>
-              <a:rPr lang="en-IE" dirty="0"/>
-              <a:t>These technologies are the software development technologies/approaches that we will teach in the course.</a:t>
-            </a:r>
+            <a:endParaRPr lang="en-IE" dirty="0"/>
           </a:p>
         </p:txBody>
       </p:sp>
@@ -11129,7 +11124,7 @@
           <a:p>
             <a:fld id="{F963DB36-5273-45A5-A77C-FE9BE0779D84}" type="slidenum">
               <a:rPr lang="en-IE" smtClean="0"/>
-              <a:t>4</a:t>
+              <a:t>5</a:t>
             </a:fld>
             <a:endParaRPr lang="en-IE"/>
           </a:p>
@@ -11138,7 +11133,7 @@
     </p:spTree>
     <p:extLst>
       <p:ext uri="{BB962C8B-B14F-4D97-AF65-F5344CB8AC3E}">
-        <p14:creationId xmlns:p14="http://schemas.microsoft.com/office/powerpoint/2010/main" val="2027208764"/>
+        <p14:creationId xmlns:p14="http://schemas.microsoft.com/office/powerpoint/2010/main" val="3303087893"/>
       </p:ext>
     </p:extLst>
   </p:cSld>
@@ -11227,7 +11222,7 @@
     </p:spTree>
     <p:extLst>
       <p:ext uri="{BB962C8B-B14F-4D97-AF65-F5344CB8AC3E}">
-        <p14:creationId xmlns:p14="http://schemas.microsoft.com/office/powerpoint/2010/main" val="3303087893"/>
+        <p14:creationId xmlns:p14="http://schemas.microsoft.com/office/powerpoint/2010/main" val="3120997934"/>
       </p:ext>
     </p:extLst>
   </p:cSld>
@@ -11286,7 +11281,28 @@
           <a:bodyPr/>
           <a:lstStyle/>
           <a:p>
-            <a:endParaRPr lang="en-IE" dirty="0"/>
+            <a:r>
+              <a:rPr lang="en-IE" dirty="0"/>
+              <a:t>Can visually the result of your programming code.</a:t>
+            </a:r>
+          </a:p>
+          <a:p>
+            <a:r>
+              <a:rPr lang="en-IE" dirty="0"/>
+              <a:t>Visual confirmation that your code is correct.</a:t>
+            </a:r>
+          </a:p>
+          <a:p>
+            <a:r>
+              <a:rPr lang="en-IE" dirty="0"/>
+              <a:t>Little “ceremony” around getting a piece of code to work…simple IDE and you can have a program with only one line of code if you wish.</a:t>
+            </a:r>
+          </a:p>
+          <a:p>
+            <a:r>
+              <a:rPr lang="en-IE" dirty="0"/>
+              <a:t>Helps with understanding flow of control e.g. sequence, selection (if), iteration (loops)</a:t>
+            </a:r>
           </a:p>
         </p:txBody>
       </p:sp>
@@ -11307,7 +11323,7 @@
           <a:p>
             <a:fld id="{F963DB36-5273-45A5-A77C-FE9BE0779D84}" type="slidenum">
               <a:rPr lang="en-IE" smtClean="0"/>
-              <a:t>7</a:t>
+              <a:t>11</a:t>
             </a:fld>
             <a:endParaRPr lang="en-IE"/>
           </a:p>
@@ -11316,7 +11332,7 @@
     </p:spTree>
     <p:extLst>
       <p:ext uri="{BB962C8B-B14F-4D97-AF65-F5344CB8AC3E}">
-        <p14:creationId xmlns:p14="http://schemas.microsoft.com/office/powerpoint/2010/main" val="3120997934"/>
+        <p14:creationId xmlns:p14="http://schemas.microsoft.com/office/powerpoint/2010/main" val="311184190"/>
       </p:ext>
     </p:extLst>
   </p:cSld>
@@ -11331,7 +11347,13 @@
   <p:cSld>
     <p:spTree>
       <p:nvGrpSpPr>
-        <p:cNvPr id="1" name=""/>
+        <p:cNvPr id="1" name="">
+          <a:extLst>
+            <a:ext uri="{FF2B5EF4-FFF2-40B4-BE49-F238E27FC236}">
+              <a16:creationId xmlns:a16="http://schemas.microsoft.com/office/drawing/2014/main" id="{99BFEB6E-3027-B453-ED29-FD7068BC20F6}"/>
+            </a:ext>
+          </a:extLst>
+        </p:cNvPr>
         <p:cNvGrpSpPr/>
         <p:nvPr/>
       </p:nvGrpSpPr>
@@ -11345,7 +11367,13 @@
       </p:grpSpPr>
       <p:sp>
         <p:nvSpPr>
-          <p:cNvPr id="2" name="Slide Image Placeholder 1"/>
+          <p:cNvPr id="2" name="Slide Image Placeholder 1">
+            <a:extLst>
+              <a:ext uri="{FF2B5EF4-FFF2-40B4-BE49-F238E27FC236}">
+                <a16:creationId xmlns:a16="http://schemas.microsoft.com/office/drawing/2014/main" id="{F8A6C0D6-2DA7-9542-A0E2-ED63150A3EFA}"/>
+              </a:ext>
+            </a:extLst>
+          </p:cNvPr>
           <p:cNvSpPr>
             <a:spLocks noGrp="1" noRot="1" noChangeAspect="1"/>
           </p:cNvSpPr>
@@ -11362,7 +11390,13 @@
       </p:sp>
       <p:sp>
         <p:nvSpPr>
-          <p:cNvPr id="3" name="Notes Placeholder 2"/>
+          <p:cNvPr id="3" name="Notes Placeholder 2">
+            <a:extLst>
+              <a:ext uri="{FF2B5EF4-FFF2-40B4-BE49-F238E27FC236}">
+                <a16:creationId xmlns:a16="http://schemas.microsoft.com/office/drawing/2014/main" id="{0DC13BB7-9C18-908E-2EDD-AE72D44B9A92}"/>
+              </a:ext>
+            </a:extLst>
+          </p:cNvPr>
           <p:cNvSpPr>
             <a:spLocks noGrp="1"/>
           </p:cNvSpPr>
@@ -11402,7 +11436,13 @@
       </p:sp>
       <p:sp>
         <p:nvSpPr>
-          <p:cNvPr id="4" name="Slide Number Placeholder 3"/>
+          <p:cNvPr id="4" name="Slide Number Placeholder 3">
+            <a:extLst>
+              <a:ext uri="{FF2B5EF4-FFF2-40B4-BE49-F238E27FC236}">
+                <a16:creationId xmlns:a16="http://schemas.microsoft.com/office/drawing/2014/main" id="{277F7B0F-E66F-2DD3-3C7C-D61F8BB2D155}"/>
+              </a:ext>
+            </a:extLst>
+          </p:cNvPr>
           <p:cNvSpPr>
             <a:spLocks noGrp="1"/>
           </p:cNvSpPr>
@@ -11426,7 +11466,7 @@
     </p:spTree>
     <p:extLst>
       <p:ext uri="{BB962C8B-B14F-4D97-AF65-F5344CB8AC3E}">
-        <p14:creationId xmlns:p14="http://schemas.microsoft.com/office/powerpoint/2010/main" val="311184190"/>
+        <p14:creationId xmlns:p14="http://schemas.microsoft.com/office/powerpoint/2010/main" val="134375130"/>
       </p:ext>
     </p:extLst>
   </p:cSld>
@@ -11618,7 +11658,7 @@
             <a:fld id="{1D8BD707-D9CF-40AE-B4C6-C98DA3205C09}" type="datetimeFigureOut">
               <a:rPr lang="en-US" smtClean="0"/>
               <a:pPr/>
-              <a:t>9/3/25</a:t>
+              <a:t>9/9/25</a:t>
             </a:fld>
             <a:endParaRPr lang="en-US"/>
           </a:p>
@@ -11790,7 +11830,7 @@
             <a:fld id="{1D8BD707-D9CF-40AE-B4C6-C98DA3205C09}" type="datetimeFigureOut">
               <a:rPr lang="en-US" smtClean="0"/>
               <a:pPr/>
-              <a:t>9/3/25</a:t>
+              <a:t>9/9/25</a:t>
             </a:fld>
             <a:endParaRPr lang="en-US"/>
           </a:p>
@@ -11972,7 +12012,7 @@
             <a:fld id="{1D8BD707-D9CF-40AE-B4C6-C98DA3205C09}" type="datetimeFigureOut">
               <a:rPr lang="en-US" smtClean="0"/>
               <a:pPr/>
-              <a:t>9/3/25</a:t>
+              <a:t>9/9/25</a:t>
             </a:fld>
             <a:endParaRPr lang="en-US"/>
           </a:p>
@@ -12285,7 +12325,7 @@
             <a:fld id="{1D8BD707-D9CF-40AE-B4C6-C98DA3205C09}" type="datetimeFigureOut">
               <a:rPr lang="en-US" smtClean="0"/>
               <a:pPr/>
-              <a:t>9/3/25</a:t>
+              <a:t>9/9/25</a:t>
             </a:fld>
             <a:endParaRPr lang="en-US"/>
           </a:p>
@@ -12615,7 +12655,7 @@
             <a:fld id="{1D8BD707-D9CF-40AE-B4C6-C98DA3205C09}" type="datetimeFigureOut">
               <a:rPr lang="en-US" smtClean="0"/>
               <a:pPr/>
-              <a:t>9/3/25</a:t>
+              <a:t>9/9/25</a:t>
             </a:fld>
             <a:endParaRPr lang="en-US"/>
           </a:p>
@@ -12916,7 +12956,7 @@
             <a:fld id="{1D8BD707-D9CF-40AE-B4C6-C98DA3205C09}" type="datetimeFigureOut">
               <a:rPr lang="en-US" smtClean="0"/>
               <a:pPr/>
-              <a:t>9/3/25</a:t>
+              <a:t>9/9/25</a:t>
             </a:fld>
             <a:endParaRPr lang="en-US"/>
           </a:p>
@@ -13423,7 +13463,7 @@
             <a:fld id="{1D8BD707-D9CF-40AE-B4C6-C98DA3205C09}" type="datetimeFigureOut">
               <a:rPr lang="en-US" smtClean="0"/>
               <a:pPr/>
-              <a:t>9/3/25</a:t>
+              <a:t>9/9/25</a:t>
             </a:fld>
             <a:endParaRPr lang="en-US"/>
           </a:p>
@@ -13589,7 +13629,7 @@
             <a:fld id="{1D8BD707-D9CF-40AE-B4C6-C98DA3205C09}" type="datetimeFigureOut">
               <a:rPr lang="en-US" smtClean="0"/>
               <a:pPr/>
-              <a:t>9/3/25</a:t>
+              <a:t>9/9/25</a:t>
             </a:fld>
             <a:endParaRPr lang="en-US"/>
           </a:p>
@@ -13762,7 +13802,7 @@
             <a:fld id="{1D8BD707-D9CF-40AE-B4C6-C98DA3205C09}" type="datetimeFigureOut">
               <a:rPr lang="en-US" smtClean="0"/>
               <a:pPr/>
-              <a:t>9/3/25</a:t>
+              <a:t>9/9/25</a:t>
             </a:fld>
             <a:endParaRPr lang="en-US"/>
           </a:p>
@@ -14041,7 +14081,7 @@
             <a:fld id="{1D8BD707-D9CF-40AE-B4C6-C98DA3205C09}" type="datetimeFigureOut">
               <a:rPr lang="en-US" smtClean="0"/>
               <a:pPr/>
-              <a:t>9/3/25</a:t>
+              <a:t>9/9/25</a:t>
             </a:fld>
             <a:endParaRPr lang="en-US"/>
           </a:p>
@@ -14300,7 +14340,7 @@
             <a:fld id="{1D8BD707-D9CF-40AE-B4C6-C98DA3205C09}" type="datetimeFigureOut">
               <a:rPr lang="en-US" smtClean="0"/>
               <a:pPr/>
-              <a:t>9/3/25</a:t>
+              <a:t>9/9/25</a:t>
             </a:fld>
             <a:endParaRPr lang="en-US"/>
           </a:p>
@@ -14515,7 +14555,7 @@
             <a:fld id="{1D8BD707-D9CF-40AE-B4C6-C98DA3205C09}" type="datetimeFigureOut">
               <a:rPr lang="en-US" smtClean="0"/>
               <a:pPr/>
-              <a:t>9/3/25</a:t>
+              <a:t>9/9/25</a:t>
             </a:fld>
             <a:endParaRPr lang="en-US"/>
           </a:p>
@@ -15220,7 +15260,13 @@
     </p:bg>
     <p:spTree>
       <p:nvGrpSpPr>
-        <p:cNvPr id="1" name=""/>
+        <p:cNvPr id="1" name="">
+          <a:extLst>
+            <a:ext uri="{FF2B5EF4-FFF2-40B4-BE49-F238E27FC236}">
+              <a16:creationId xmlns:a16="http://schemas.microsoft.com/office/drawing/2014/main" id="{8518F539-6B57-0DD4-091E-470272C2B6BF}"/>
+            </a:ext>
+          </a:extLst>
+        </p:cNvPr>
         <p:cNvGrpSpPr/>
         <p:nvPr/>
       </p:nvGrpSpPr>
@@ -15234,7 +15280,13 @@
       </p:grpSpPr>
       <p:sp>
         <p:nvSpPr>
-          <p:cNvPr id="2" name="Title 1"/>
+          <p:cNvPr id="2" name="Title 1">
+            <a:extLst>
+              <a:ext uri="{FF2B5EF4-FFF2-40B4-BE49-F238E27FC236}">
+                <a16:creationId xmlns:a16="http://schemas.microsoft.com/office/drawing/2014/main" id="{269D58E5-3A2E-DA69-DB4D-1C62AC8AECD1}"/>
+              </a:ext>
+            </a:extLst>
+          </p:cNvPr>
           <p:cNvSpPr>
             <a:spLocks noGrp="1"/>
           </p:cNvSpPr>
@@ -15242,130 +15294,25 @@
             <p:ph type="title"/>
           </p:nvPr>
         </p:nvSpPr>
-        <p:spPr/>
+        <p:spPr>
+          <a:xfrm>
+            <a:off x="1905000" y="274638"/>
+            <a:ext cx="7391400" cy="1143000"/>
+          </a:xfrm>
+        </p:spPr>
         <p:txBody>
           <a:bodyPr/>
           <a:lstStyle/>
           <a:p>
             <a:r>
               <a:rPr lang="en-IE" dirty="0"/>
-              <a:t>What is </a:t>
+              <a:t>What language is behind </a:t>
             </a:r>
             <a:r>
-              <a:rPr lang="en-IE"/>
-              <a:t>BlueJ?</a:t>
+              <a:rPr lang="en-IE" dirty="0" err="1"/>
+              <a:t>Bluej</a:t>
             </a:r>
             <a:endParaRPr lang="en-IE" dirty="0"/>
-          </a:p>
-        </p:txBody>
-      </p:sp>
-      <p:sp>
-        <p:nvSpPr>
-          <p:cNvPr id="3" name="Content Placeholder 2"/>
-          <p:cNvSpPr>
-            <a:spLocks noGrp="1"/>
-          </p:cNvSpPr>
-          <p:nvPr>
-            <p:ph idx="1"/>
-          </p:nvPr>
-        </p:nvSpPr>
-        <p:spPr>
-          <a:xfrm>
-            <a:off x="609600" y="1752600"/>
-            <a:ext cx="11277600" cy="1447800"/>
-          </a:xfrm>
-        </p:spPr>
-        <p:txBody>
-          <a:bodyPr>
-            <a:normAutofit/>
-          </a:bodyPr>
-          <a:lstStyle/>
-          <a:p>
-            <a:pPr marL="0" indent="0">
-              <a:buNone/>
-            </a:pPr>
-            <a:r>
-              <a:rPr lang="en-IE" sz="2800" b="1" dirty="0" err="1"/>
-              <a:t>Bluej</a:t>
-            </a:r>
-            <a:r>
-              <a:rPr lang="en-IE" sz="2800" dirty="0"/>
-              <a:t> is a </a:t>
-            </a:r>
-          </a:p>
-          <a:p>
-            <a:pPr marL="0" indent="0">
-              <a:buNone/>
-            </a:pPr>
-            <a:r>
-              <a:rPr lang="en-IE" sz="2800" dirty="0"/>
-              <a:t>programming language, development environment, and online community</a:t>
-            </a:r>
-          </a:p>
-        </p:txBody>
-      </p:sp>
-      <p:sp>
-        <p:nvSpPr>
-          <p:cNvPr id="5" name="Rectangle 4">
-            <a:extLst>
-              <a:ext uri="{FF2B5EF4-FFF2-40B4-BE49-F238E27FC236}">
-                <a16:creationId xmlns:a16="http://schemas.microsoft.com/office/drawing/2014/main" id="{2B6C10E6-9845-42E3-8563-37CCEEDBAE64}"/>
-              </a:ext>
-            </a:extLst>
-          </p:cNvPr>
-          <p:cNvSpPr/>
-          <p:nvPr/>
-        </p:nvSpPr>
-        <p:spPr>
-          <a:xfrm>
-            <a:off x="304800" y="3048000"/>
-            <a:ext cx="12986952" cy="2677656"/>
-          </a:xfrm>
-          <a:prstGeom prst="rect">
-            <a:avLst/>
-          </a:prstGeom>
-        </p:spPr>
-        <p:txBody>
-          <a:bodyPr wrap="square">
-            <a:spAutoFit/>
-          </a:bodyPr>
-          <a:lstStyle/>
-          <a:p>
-            <a:pPr marL="400050" lvl="1"/>
-            <a:r>
-              <a:rPr lang="en-IE" sz="2800" dirty="0"/>
-              <a:t>…can be used to develop static or interactive online material </a:t>
-            </a:r>
-            <a:br>
-              <a:rPr lang="en-IE" sz="2800" dirty="0"/>
-            </a:br>
-            <a:r>
-              <a:rPr lang="en-IE" sz="2800" dirty="0"/>
-              <a:t>and data visualisations.</a:t>
-            </a:r>
-          </a:p>
-          <a:p>
-            <a:pPr marL="400050" lvl="1"/>
-            <a:endParaRPr lang="en-IE" sz="2800" dirty="0"/>
-          </a:p>
-          <a:p>
-            <a:pPr marL="400050" lvl="1"/>
-            <a:r>
-              <a:rPr lang="en-IE" sz="2800" dirty="0"/>
-              <a:t>…is often used by visual artists.</a:t>
-            </a:r>
-          </a:p>
-          <a:p>
-            <a:pPr marL="400050" lvl="1"/>
-            <a:endParaRPr lang="en-IE" sz="2800" dirty="0"/>
-          </a:p>
-          <a:p>
-            <a:pPr marL="400050" lvl="1"/>
-            <a:r>
-              <a:rPr lang="en-IE" sz="2800" dirty="0"/>
-              <a:t>…produces visual and interactive representations of programming code.</a:t>
-            </a:r>
-            <a:endParaRPr lang="en-IE" sz="2800" b="1" dirty="0"/>
           </a:p>
         </p:txBody>
       </p:sp>
@@ -15374,7 +15321,7 @@
           <p:cNvPr id="6" name="Picture 5">
             <a:extLst>
               <a:ext uri="{FF2B5EF4-FFF2-40B4-BE49-F238E27FC236}">
-                <a16:creationId xmlns:a16="http://schemas.microsoft.com/office/drawing/2014/main" id="{5A494C72-5714-AE54-67F1-A0C6FD01ADD6}"/>
+                <a16:creationId xmlns:a16="http://schemas.microsoft.com/office/drawing/2014/main" id="{1577C6BB-0230-D99B-74D8-9396584691E9}"/>
               </a:ext>
             </a:extLst>
           </p:cNvPr>
@@ -15399,94 +15346,163 @@
           </a:prstGeom>
         </p:spPr>
       </p:pic>
+      <p:sp>
+        <p:nvSpPr>
+          <p:cNvPr id="7" name="TextBox 6">
+            <a:extLst>
+              <a:ext uri="{FF2B5EF4-FFF2-40B4-BE49-F238E27FC236}">
+                <a16:creationId xmlns:a16="http://schemas.microsoft.com/office/drawing/2014/main" id="{1CA8BA3E-C806-D518-A74F-BCA09840EDFB}"/>
+              </a:ext>
+            </a:extLst>
+          </p:cNvPr>
+          <p:cNvSpPr txBox="1"/>
+          <p:nvPr/>
+        </p:nvSpPr>
+        <p:spPr>
+          <a:xfrm>
+            <a:off x="655416" y="2057400"/>
+            <a:ext cx="9890567" cy="3539430"/>
+          </a:xfrm>
+          <a:prstGeom prst="rect">
+            <a:avLst/>
+          </a:prstGeom>
+          <a:noFill/>
+        </p:spPr>
+        <p:txBody>
+          <a:bodyPr wrap="square">
+            <a:spAutoFit/>
+          </a:bodyPr>
+          <a:lstStyle/>
+          <a:p>
+            <a:r>
+              <a:rPr lang="en-IE" sz="3200" dirty="0" err="1"/>
+              <a:t>BlueJ</a:t>
+            </a:r>
+            <a:r>
+              <a:rPr lang="en-IE" sz="3200" dirty="0"/>
+              <a:t> doesn’t come with its own Java — it depends on the Java Development Kit (JDK) you install. </a:t>
+            </a:r>
+          </a:p>
+          <a:p>
+            <a:endParaRPr lang="en-IE" sz="3200" dirty="0"/>
+          </a:p>
+          <a:p>
+            <a:r>
+              <a:rPr lang="en-IE" sz="3200" dirty="0"/>
+              <a:t>The </a:t>
+            </a:r>
+            <a:r>
+              <a:rPr lang="en-IE" sz="3200" b="1" dirty="0"/>
+              <a:t>current release (</a:t>
+            </a:r>
+            <a:r>
+              <a:rPr lang="en-IE" sz="3200" b="1" dirty="0" err="1"/>
+              <a:t>BlueJ</a:t>
+            </a:r>
+            <a:r>
+              <a:rPr lang="en-IE" sz="3200" b="1" dirty="0"/>
+              <a:t> 5.7.0, May 2024)</a:t>
+            </a:r>
+            <a:r>
+              <a:rPr lang="en-IE" sz="3200" dirty="0"/>
+              <a:t> works with:</a:t>
+            </a:r>
+          </a:p>
+          <a:p>
+            <a:pPr marL="457200" indent="-457200">
+              <a:buFont typeface="Arial" panose="020B0604020202020204" pitchFamily="34" charset="0"/>
+              <a:buChar char="•"/>
+            </a:pPr>
+            <a:r>
+              <a:rPr lang="en-IE" sz="3200" i="1" dirty="0">
+                <a:highlight>
+                  <a:srgbClr val="C1C1C1"/>
+                </a:highlight>
+              </a:rPr>
+              <a:t>Java 11 (LTS)</a:t>
+            </a:r>
+          </a:p>
+          <a:p>
+            <a:pPr marL="457200" indent="-457200">
+              <a:buFont typeface="Arial" panose="020B0604020202020204" pitchFamily="34" charset="0"/>
+              <a:buChar char="•"/>
+            </a:pPr>
+            <a:r>
+              <a:rPr lang="en-IE" sz="3200" b="1" dirty="0"/>
+              <a:t>Java 17 (LTS)</a:t>
+            </a:r>
+            <a:endParaRPr lang="en-IE" sz="3200" dirty="0"/>
+          </a:p>
+          <a:p>
+            <a:pPr marL="457200" indent="-457200">
+              <a:buFont typeface="Arial" panose="020B0604020202020204" pitchFamily="34" charset="0"/>
+              <a:buChar char="•"/>
+            </a:pPr>
+            <a:r>
+              <a:rPr lang="en-IE" sz="3200" b="1" dirty="0"/>
+              <a:t>Java 21 (LTS, current recommended version)</a:t>
+            </a:r>
+            <a:endParaRPr lang="en-IE" sz="3200" dirty="0"/>
+          </a:p>
+        </p:txBody>
+      </p:sp>
+      <p:pic>
+        <p:nvPicPr>
+          <p:cNvPr id="3" name="Picture 2" descr="Image result for java">
+            <a:extLst>
+              <a:ext uri="{FF2B5EF4-FFF2-40B4-BE49-F238E27FC236}">
+                <a16:creationId xmlns:a16="http://schemas.microsoft.com/office/drawing/2014/main" id="{2F839475-2A7E-3432-0F63-667AA168B105}"/>
+              </a:ext>
+            </a:extLst>
+          </p:cNvPr>
+          <p:cNvPicPr>
+            <a:picLocks noChangeAspect="1" noChangeArrowheads="1"/>
+          </p:cNvPicPr>
+          <p:nvPr/>
+        </p:nvPicPr>
+        <p:blipFill>
+          <a:blip r:embed="rId4" cstate="print">
+            <a:extLst>
+              <a:ext uri="{28A0092B-C50C-407E-A947-70E740481C1C}">
+                <a14:useLocalDpi xmlns:a14="http://schemas.microsoft.com/office/drawing/2010/main" val="0"/>
+              </a:ext>
+            </a:extLst>
+          </a:blip>
+          <a:srcRect/>
+          <a:stretch>
+            <a:fillRect/>
+          </a:stretch>
+        </p:blipFill>
+        <p:spPr bwMode="auto">
+          <a:xfrm>
+            <a:off x="-174083" y="-141431"/>
+            <a:ext cx="1837944" cy="1837944"/>
+          </a:xfrm>
+          <a:prstGeom prst="rect">
+            <a:avLst/>
+          </a:prstGeom>
+          <a:noFill/>
+          <a:extLst>
+            <a:ext uri="{909E8E84-426E-40DD-AFC4-6F175D3DCCD1}">
+              <a14:hiddenFill xmlns:a14="http://schemas.microsoft.com/office/drawing/2010/main">
+                <a:solidFill>
+                  <a:srgbClr val="FFFFFF"/>
+                </a:solidFill>
+              </a14:hiddenFill>
+            </a:ext>
+          </a:extLst>
+        </p:spPr>
+      </p:pic>
     </p:spTree>
     <p:extLst>
       <p:ext uri="{BB962C8B-B14F-4D97-AF65-F5344CB8AC3E}">
-        <p14:creationId xmlns:p14="http://schemas.microsoft.com/office/powerpoint/2010/main" val="3041990600"/>
+        <p14:creationId xmlns:p14="http://schemas.microsoft.com/office/powerpoint/2010/main" val="39224953"/>
       </p:ext>
     </p:extLst>
   </p:cSld>
   <p:clrMapOvr>
     <a:overrideClrMapping bg1="lt1" tx1="dk1" bg2="lt2" tx2="dk2" accent1="accent1" accent2="accent2" accent3="accent3" accent4="accent4" accent5="accent5" accent6="accent6" hlink="hlink" folHlink="folHlink"/>
   </p:clrMapOvr>
-  <p:timing>
-    <p:tnLst>
-      <p:par>
-        <p:cTn id="1" dur="indefinite" restart="never" nodeType="tmRoot">
-          <p:childTnLst>
-            <p:seq concurrent="1" nextAc="seek">
-              <p:cTn id="2" dur="indefinite" nodeType="mainSeq">
-                <p:childTnLst>
-                  <p:par>
-                    <p:cTn id="3" fill="hold">
-                      <p:stCondLst>
-                        <p:cond delay="indefinite"/>
-                      </p:stCondLst>
-                      <p:childTnLst>
-                        <p:par>
-                          <p:cTn id="4" fill="hold">
-                            <p:stCondLst>
-                              <p:cond delay="0"/>
-                            </p:stCondLst>
-                            <p:childTnLst>
-                              <p:par>
-                                <p:cTn id="5" presetID="1" presetClass="entr" presetSubtype="0" fill="hold" grpId="0" nodeType="clickEffect">
-                                  <p:stCondLst>
-                                    <p:cond delay="0"/>
-                                  </p:stCondLst>
-                                  <p:childTnLst>
-                                    <p:set>
-                                      <p:cBhvr>
-                                        <p:cTn id="6" dur="1" fill="hold">
-                                          <p:stCondLst>
-                                            <p:cond delay="0"/>
-                                          </p:stCondLst>
-                                        </p:cTn>
-                                        <p:tgtEl>
-                                          <p:spTgt spid="5"/>
-                                        </p:tgtEl>
-                                        <p:attrNameLst>
-                                          <p:attrName>style.visibility</p:attrName>
-                                        </p:attrNameLst>
-                                      </p:cBhvr>
-                                      <p:to>
-                                        <p:strVal val="visible"/>
-                                      </p:to>
-                                    </p:set>
-                                  </p:childTnLst>
-                                </p:cTn>
-                              </p:par>
-                            </p:childTnLst>
-                          </p:cTn>
-                        </p:par>
-                      </p:childTnLst>
-                    </p:cTn>
-                  </p:par>
-                </p:childTnLst>
-              </p:cTn>
-              <p:prevCondLst>
-                <p:cond evt="onPrev" delay="0">
-                  <p:tgtEl>
-                    <p:sldTgt/>
-                  </p:tgtEl>
-                </p:cond>
-              </p:prevCondLst>
-              <p:nextCondLst>
-                <p:cond evt="onNext" delay="0">
-                  <p:tgtEl>
-                    <p:sldTgt/>
-                  </p:tgtEl>
-                </p:cond>
-              </p:nextCondLst>
-            </p:seq>
-          </p:childTnLst>
-        </p:cTn>
-      </p:par>
-    </p:tnLst>
-    <p:bldLst>
-      <p:bldP spid="5" grpId="0"/>
-    </p:bldLst>
-  </p:timing>
 </p:sld>
 </file>
 
@@ -15532,7 +15548,15 @@
           <a:p>
             <a:r>
               <a:rPr lang="en-IE" dirty="0"/>
-              <a:t>What is Processing?</a:t>
+              <a:t>Why are we using </a:t>
+            </a:r>
+            <a:r>
+              <a:rPr lang="en-IE" dirty="0" err="1"/>
+              <a:t>BlueJ</a:t>
+            </a:r>
+            <a:r>
+              <a:rPr lang="en-IE" dirty="0"/>
+              <a:t>?</a:t>
             </a:r>
           </a:p>
         </p:txBody>
@@ -15550,151 +15574,85 @@
         <p:spPr/>
         <p:txBody>
           <a:bodyPr>
-            <a:normAutofit lnSpcReduction="10000"/>
+            <a:normAutofit/>
           </a:bodyPr>
           <a:lstStyle/>
           <a:p>
             <a:pPr lvl="0"/>
+            <a:endParaRPr lang="en-IE" i="1" dirty="0"/>
+          </a:p>
+          <a:p>
             <a:r>
-              <a:rPr lang="en-IE" dirty="0"/>
-              <a:t>Different programming languages can be used with Processing e.g. :</a:t>
+              <a:rPr lang="en-IE" sz="3600" dirty="0"/>
+              <a:t>It’s developed for introductory programming courses</a:t>
             </a:r>
           </a:p>
           <a:p>
-            <a:pPr lvl="0"/>
-            <a:endParaRPr lang="en-IE" dirty="0"/>
-          </a:p>
-          <a:p>
-            <a:pPr lvl="1"/>
             <a:r>
-              <a:rPr lang="en-IE" b="1" dirty="0"/>
-              <a:t>Java</a:t>
+              <a:rPr lang="en-IE" sz="3600" dirty="0"/>
+              <a:t>Objects first approach</a:t>
             </a:r>
+          </a:p>
+          <a:p>
             <a:r>
-              <a:rPr lang="en-IE" dirty="0"/>
-              <a:t>:  </a:t>
+              <a:rPr lang="en-IE" sz="3600" dirty="0"/>
+              <a:t>Minimal interface and reduced distraction versus full Integrated Development Environments</a:t>
             </a:r>
+          </a:p>
+          <a:p>
             <a:r>
-              <a:rPr lang="en-IE" dirty="0" err="1"/>
-              <a:t>ver</a:t>
-            </a:r>
-            <a:r>
-              <a:rPr lang="en-IE" dirty="0"/>
-              <a:t> 4 uses Java 17, </a:t>
-            </a:r>
-            <a:r>
-              <a:rPr lang="en-IE" dirty="0" err="1"/>
-              <a:t>ver</a:t>
-            </a:r>
-            <a:r>
-              <a:rPr lang="en-IE" dirty="0"/>
-              <a:t> 3 uses Java 8.</a:t>
-            </a:r>
-          </a:p>
-          <a:p>
-            <a:pPr lvl="1"/>
-            <a:r>
-              <a:rPr lang="en-IE" b="1" dirty="0"/>
-              <a:t>JavaScript</a:t>
-            </a:r>
-            <a:r>
-              <a:rPr lang="en-IE" dirty="0"/>
-              <a:t> (p5.js)</a:t>
-            </a:r>
-          </a:p>
-          <a:p>
-            <a:pPr lvl="1"/>
-            <a:r>
-              <a:rPr lang="en-IE" b="1" dirty="0"/>
-              <a:t>Python</a:t>
-            </a:r>
-          </a:p>
-          <a:p>
-            <a:pPr lvl="1"/>
-            <a:endParaRPr lang="en-IE" dirty="0"/>
-          </a:p>
-          <a:p>
-            <a:r>
-              <a:rPr lang="en-IE" dirty="0"/>
-              <a:t>It can be used on different platforms :</a:t>
-            </a:r>
-          </a:p>
-          <a:p>
-            <a:pPr lvl="1"/>
-            <a:r>
-              <a:rPr lang="en-IE" dirty="0"/>
-              <a:t>Windows, OSX, </a:t>
-            </a:r>
-            <a:r>
-              <a:rPr lang="en-IE" b="1" dirty="0"/>
-              <a:t>Linux</a:t>
-            </a:r>
-            <a:r>
-              <a:rPr lang="en-IE" dirty="0"/>
-              <a:t> and now </a:t>
-            </a:r>
-            <a:r>
-              <a:rPr lang="en-IE" b="1" dirty="0"/>
-              <a:t>Android</a:t>
+              <a:rPr lang="en-IE" sz="3600" dirty="0"/>
+              <a:t>Immediate Feedback</a:t>
             </a:r>
           </a:p>
           <a:p>
             <a:pPr marL="0" indent="0">
               <a:buNone/>
             </a:pPr>
-            <a:endParaRPr lang="en-IE" dirty="0"/>
+            <a:endParaRPr lang="en-IE" i="1" dirty="0"/>
           </a:p>
         </p:txBody>
       </p:sp>
       <p:pic>
         <p:nvPicPr>
-          <p:cNvPr id="4" name="Picture 2">
+          <p:cNvPr id="4" name="Picture 3">
             <a:extLst>
               <a:ext uri="{FF2B5EF4-FFF2-40B4-BE49-F238E27FC236}">
-                <a16:creationId xmlns:a16="http://schemas.microsoft.com/office/drawing/2014/main" id="{9C4EF4F3-2FEC-4D3D-AB74-AD60E4978FB6}"/>
+                <a16:creationId xmlns:a16="http://schemas.microsoft.com/office/drawing/2014/main" id="{FAD41B3F-3B8E-3A3C-55A7-5B6FE0D5DE68}"/>
               </a:ext>
             </a:extLst>
           </p:cNvPr>
           <p:cNvPicPr>
-            <a:picLocks noChangeAspect="1" noChangeArrowheads="1"/>
+            <a:picLocks noChangeAspect="1"/>
           </p:cNvPicPr>
           <p:nvPr/>
         </p:nvPicPr>
         <p:blipFill>
-          <a:blip r:embed="rId3" cstate="print">
+          <a:blip r:embed="rId4">
             <a:extLst>
               <a:ext uri="{28A0092B-C50C-407E-A947-70E740481C1C}">
                 <a14:useLocalDpi xmlns:a14="http://schemas.microsoft.com/office/drawing/2010/main" val="0"/>
               </a:ext>
             </a:extLst>
           </a:blip>
-          <a:srcRect/>
-          <a:stretch/>
+          <a:stretch>
+            <a:fillRect/>
+          </a:stretch>
         </p:blipFill>
-        <p:spPr bwMode="auto">
+        <p:spPr>
           <a:xfrm>
-            <a:off x="8991600" y="46036"/>
-            <a:ext cx="1371600" cy="1371600"/>
+            <a:off x="9677400" y="0"/>
+            <a:ext cx="1905000" cy="1428750"/>
           </a:xfrm>
           <a:prstGeom prst="rect">
             <a:avLst/>
           </a:prstGeom>
-          <a:noFill/>
-          <a:extLst>
-            <a:ext uri="{909E8E84-426E-40DD-AFC4-6F175D3DCCD1}">
-              <a14:hiddenFill xmlns:a14="http://schemas.microsoft.com/office/drawing/2010/main">
-                <a:solidFill>
-                  <a:srgbClr val="FFFFFF"/>
-                </a:solidFill>
-              </a14:hiddenFill>
-            </a:ext>
-          </a:extLst>
         </p:spPr>
       </p:pic>
     </p:spTree>
     <p:extLst>
       <p:ext uri="{BB962C8B-B14F-4D97-AF65-F5344CB8AC3E}">
-        <p14:creationId xmlns:p14="http://schemas.microsoft.com/office/powerpoint/2010/main" val="4043535386"/>
+        <p14:creationId xmlns:p14="http://schemas.microsoft.com/office/powerpoint/2010/main" val="423080069"/>
       </p:ext>
     </p:extLst>
   </p:cSld>
@@ -15717,7 +15675,13 @@
     </p:bg>
     <p:spTree>
       <p:nvGrpSpPr>
-        <p:cNvPr id="1" name=""/>
+        <p:cNvPr id="1" name="">
+          <a:extLst>
+            <a:ext uri="{FF2B5EF4-FFF2-40B4-BE49-F238E27FC236}">
+              <a16:creationId xmlns:a16="http://schemas.microsoft.com/office/drawing/2014/main" id="{F72A91F5-0578-AAEB-5546-25583BF45DC9}"/>
+            </a:ext>
+          </a:extLst>
+        </p:cNvPr>
         <p:cNvGrpSpPr/>
         <p:nvPr/>
       </p:nvGrpSpPr>
@@ -15731,7 +15695,13 @@
       </p:grpSpPr>
       <p:sp>
         <p:nvSpPr>
-          <p:cNvPr id="2" name="Title 1"/>
+          <p:cNvPr id="2" name="Title 1">
+            <a:extLst>
+              <a:ext uri="{FF2B5EF4-FFF2-40B4-BE49-F238E27FC236}">
+                <a16:creationId xmlns:a16="http://schemas.microsoft.com/office/drawing/2014/main" id="{44C76AB6-112F-8764-BF93-30E534F204C0}"/>
+              </a:ext>
+            </a:extLst>
+          </p:cNvPr>
           <p:cNvSpPr>
             <a:spLocks noGrp="1"/>
           </p:cNvSpPr>
@@ -15739,21 +15709,32 @@
             <p:ph type="title"/>
           </p:nvPr>
         </p:nvSpPr>
-        <p:spPr/>
+        <p:spPr>
+          <a:xfrm>
+            <a:off x="609600" y="371476"/>
+            <a:ext cx="10972800" cy="1143000"/>
+          </a:xfrm>
+        </p:spPr>
         <p:txBody>
           <a:bodyPr/>
           <a:lstStyle/>
           <a:p>
             <a:r>
               <a:rPr lang="en-IE" dirty="0"/>
-              <a:t>Why are we using Processing?</a:t>
+              <a:t>References</a:t>
             </a:r>
           </a:p>
         </p:txBody>
       </p:sp>
       <p:sp>
         <p:nvSpPr>
-          <p:cNvPr id="3" name="Content Placeholder 2"/>
+          <p:cNvPr id="3" name="Content Placeholder 2">
+            <a:extLst>
+              <a:ext uri="{FF2B5EF4-FFF2-40B4-BE49-F238E27FC236}">
+                <a16:creationId xmlns:a16="http://schemas.microsoft.com/office/drawing/2014/main" id="{48535D47-8F5B-075F-26EF-74329DD40F64}"/>
+              </a:ext>
+            </a:extLst>
+          </p:cNvPr>
           <p:cNvSpPr>
             <a:spLocks noGrp="1"/>
           </p:cNvSpPr>
@@ -15772,40 +15753,9 @@
             <a:endParaRPr lang="en-IE" i="1" dirty="0"/>
           </a:p>
           <a:p>
-            <a:pPr marL="0" indent="0" algn="ctr">
-              <a:buNone/>
-            </a:pPr>
             <a:r>
-              <a:rPr lang="en-IE" sz="3600" i="1" dirty="0"/>
-              <a:t>Processing is increasingly used </a:t>
-            </a:r>
-          </a:p>
-          <a:p>
-            <a:pPr marL="0" indent="0" algn="ctr">
-              <a:buNone/>
-            </a:pPr>
-            <a:r>
-              <a:rPr lang="en-IE" sz="3600" i="1" dirty="0"/>
-              <a:t>to teach computer </a:t>
-            </a:r>
-          </a:p>
-          <a:p>
-            <a:pPr marL="0" indent="0" algn="ctr">
-              <a:buNone/>
-            </a:pPr>
-            <a:r>
-              <a:rPr lang="en-IE" sz="3600" i="1" dirty="0"/>
-              <a:t>programming fundamentals (</a:t>
-            </a:r>
-            <a:r>
-              <a:rPr lang="en-IE" sz="3600" i="1" dirty="0">
-                <a:hlinkClick r:id="rId4"/>
-              </a:rPr>
-              <a:t>https://processing.org/overview/</a:t>
-            </a:r>
-            <a:r>
-              <a:rPr lang="en-IE" sz="3600" i="1" dirty="0"/>
-              <a:t>) </a:t>
+              <a:rPr lang="en-IE" sz="3600" dirty="0"/>
+              <a:t>This course is largely based on the Book </a:t>
             </a:r>
           </a:p>
           <a:p>
@@ -15813,13 +15763,169 @@
               <a:buNone/>
             </a:pPr>
             <a:endParaRPr lang="en-IE" i="1" dirty="0"/>
+          </a:p>
+        </p:txBody>
+      </p:sp>
+      <p:pic>
+        <p:nvPicPr>
+          <p:cNvPr id="4" name="Picture 3">
+            <a:extLst>
+              <a:ext uri="{FF2B5EF4-FFF2-40B4-BE49-F238E27FC236}">
+                <a16:creationId xmlns:a16="http://schemas.microsoft.com/office/drawing/2014/main" id="{83D19684-6926-2C6D-FB91-EEB2A390D52D}"/>
+              </a:ext>
+            </a:extLst>
+          </p:cNvPr>
+          <p:cNvPicPr>
+            <a:picLocks noChangeAspect="1"/>
+          </p:cNvPicPr>
+          <p:nvPr/>
+        </p:nvPicPr>
+        <p:blipFill>
+          <a:blip r:embed="rId4">
+            <a:extLst>
+              <a:ext uri="{28A0092B-C50C-407E-A947-70E740481C1C}">
+                <a14:useLocalDpi xmlns:a14="http://schemas.microsoft.com/office/drawing/2010/main" val="0"/>
+              </a:ext>
+            </a:extLst>
+          </a:blip>
+          <a:stretch>
+            <a:fillRect/>
+          </a:stretch>
+        </p:blipFill>
+        <p:spPr>
+          <a:xfrm>
+            <a:off x="9677400" y="0"/>
+            <a:ext cx="1905000" cy="1428750"/>
+          </a:xfrm>
+          <a:prstGeom prst="rect">
+            <a:avLst/>
+          </a:prstGeom>
+        </p:spPr>
+      </p:pic>
+      <p:pic>
+        <p:nvPicPr>
+          <p:cNvPr id="5" name="Picture 4">
+            <a:extLst>
+              <a:ext uri="{FF2B5EF4-FFF2-40B4-BE49-F238E27FC236}">
+                <a16:creationId xmlns:a16="http://schemas.microsoft.com/office/drawing/2014/main" id="{40833BBB-F602-87FC-70A9-986D4D9659BE}"/>
+              </a:ext>
+            </a:extLst>
+          </p:cNvPr>
+          <p:cNvPicPr>
+            <a:picLocks noChangeAspect="1"/>
+          </p:cNvPicPr>
+          <p:nvPr/>
+        </p:nvPicPr>
+        <p:blipFill>
+          <a:blip r:embed="rId5"/>
+          <a:stretch>
+            <a:fillRect/>
+          </a:stretch>
+        </p:blipFill>
+        <p:spPr>
+          <a:xfrm>
+            <a:off x="1676400" y="2985701"/>
+            <a:ext cx="1879600" cy="2387600"/>
+          </a:xfrm>
+          <a:prstGeom prst="rect">
+            <a:avLst/>
+          </a:prstGeom>
+        </p:spPr>
+      </p:pic>
+      <p:sp>
+        <p:nvSpPr>
+          <p:cNvPr id="6" name="TextBox 5">
+            <a:extLst>
+              <a:ext uri="{FF2B5EF4-FFF2-40B4-BE49-F238E27FC236}">
+                <a16:creationId xmlns:a16="http://schemas.microsoft.com/office/drawing/2014/main" id="{F6ABA13B-2B43-680A-34C1-D302C7D47ACB}"/>
+              </a:ext>
+            </a:extLst>
+          </p:cNvPr>
+          <p:cNvSpPr txBox="1"/>
+          <p:nvPr/>
+        </p:nvSpPr>
+        <p:spPr>
+          <a:xfrm>
+            <a:off x="4876800" y="3440837"/>
+            <a:ext cx="5029200" cy="1477328"/>
+          </a:xfrm>
+          <a:prstGeom prst="rect">
+            <a:avLst/>
+          </a:prstGeom>
+          <a:noFill/>
+        </p:spPr>
+        <p:txBody>
+          <a:bodyPr wrap="square" rtlCol="0">
+            <a:spAutoFit/>
+          </a:bodyPr>
+          <a:lstStyle/>
+          <a:p>
+            <a:r>
+              <a:rPr lang="en-IE" dirty="0"/>
+              <a:t>Objects First with Java: A Practical Introduction Using </a:t>
+            </a:r>
+            <a:r>
+              <a:rPr lang="en-IE" dirty="0" err="1"/>
+              <a:t>BlueJ</a:t>
+            </a:r>
+            <a:r>
+              <a:rPr lang="en-IE" dirty="0"/>
+              <a:t>, </a:t>
+            </a:r>
+          </a:p>
+          <a:p>
+            <a:r>
+              <a:rPr lang="en-IE" dirty="0"/>
+              <a:t>Global Edition Paperback – 21 July 2025</a:t>
+            </a:r>
+          </a:p>
+          <a:p>
+            <a:r>
+              <a:rPr lang="en-IE" dirty="0"/>
+              <a:t>by </a:t>
+            </a:r>
+            <a:r>
+              <a:rPr lang="en-IE" dirty="0">
+                <a:hlinkClick r:id="rId6">
+                  <a:extLst>
+                    <a:ext uri="{A12FA001-AC4F-418D-AE19-62706E023703}">
+                      <ahyp:hlinkClr xmlns:ahyp="http://schemas.microsoft.com/office/drawing/2018/hyperlinkcolor" val="tx"/>
+                    </a:ext>
+                  </a:extLst>
+                </a:hlinkClick>
+              </a:rPr>
+              <a:t>David Barnes</a:t>
+            </a:r>
+            <a:r>
+              <a:rPr lang="en-IE" dirty="0"/>
+              <a:t> (Author), </a:t>
+            </a:r>
+            <a:r>
+              <a:rPr lang="en-IE" dirty="0">
+                <a:hlinkClick r:id="rId7">
+                  <a:extLst>
+                    <a:ext uri="{A12FA001-AC4F-418D-AE19-62706E023703}">
+                      <ahyp:hlinkClr xmlns:ahyp="http://schemas.microsoft.com/office/drawing/2018/hyperlinkcolor" val="tx"/>
+                    </a:ext>
+                  </a:extLst>
+                </a:hlinkClick>
+              </a:rPr>
+              <a:t>Michael Kölling</a:t>
+            </a:r>
+            <a:r>
+              <a:rPr lang="en-IE" dirty="0"/>
+              <a:t> (Author)</a:t>
+            </a:r>
+          </a:p>
+          <a:p>
+            <a:endParaRPr lang="en-US" dirty="0"/>
           </a:p>
         </p:txBody>
       </p:sp>
     </p:spTree>
     <p:extLst>
       <p:ext uri="{BB962C8B-B14F-4D97-AF65-F5344CB8AC3E}">
-        <p14:creationId xmlns:p14="http://schemas.microsoft.com/office/powerpoint/2010/main" val="423080069"/>
+        <p14:creationId xmlns:p14="http://schemas.microsoft.com/office/powerpoint/2010/main" val="3072346161"/>
       </p:ext>
     </p:extLst>
   </p:cSld>
@@ -15861,552 +15967,15 @@
             <a:spLocks noGrp="1"/>
           </p:cNvSpPr>
           <p:nvPr>
-            <p:ph type="title"/>
+            <p:ph type="title" idx="4294967295"/>
           </p:nvPr>
-        </p:nvSpPr>
-        <p:spPr/>
-        <p:txBody>
-          <a:bodyPr>
-            <a:normAutofit/>
-          </a:bodyPr>
-          <a:lstStyle/>
-          <a:p>
-            <a:r>
-              <a:rPr lang="en-IE" dirty="0"/>
-              <a:t>Some </a:t>
-            </a:r>
-            <a:r>
-              <a:rPr lang="en-IE" b="1" dirty="0"/>
-              <a:t>eBooks</a:t>
-            </a:r>
-            <a:r>
-              <a:rPr lang="en-IE" dirty="0"/>
-              <a:t> in WIT library</a:t>
-            </a:r>
-          </a:p>
-        </p:txBody>
-      </p:sp>
-      <p:pic>
-        <p:nvPicPr>
-          <p:cNvPr id="1026" name="Picture 2"/>
-          <p:cNvPicPr>
-            <a:picLocks noChangeAspect="1" noChangeArrowheads="1"/>
-          </p:cNvPicPr>
-          <p:nvPr/>
-        </p:nvPicPr>
-        <p:blipFill rotWithShape="1">
-          <a:blip r:embed="rId3">
-            <a:extLst>
-              <a:ext uri="{28A0092B-C50C-407E-A947-70E740481C1C}">
-                <a14:useLocalDpi xmlns:a14="http://schemas.microsoft.com/office/drawing/2010/main" val="0"/>
-              </a:ext>
-            </a:extLst>
-          </a:blip>
-          <a:srcRect l="52663" t="27282" r="20981" b="11260"/>
-          <a:stretch/>
-        </p:blipFill>
-        <p:spPr bwMode="auto">
-          <a:xfrm>
-            <a:off x="609600" y="1828800"/>
-            <a:ext cx="3429000" cy="4495800"/>
-          </a:xfrm>
-          <a:prstGeom prst="rect">
-            <a:avLst/>
-          </a:prstGeom>
-          <a:noFill/>
-          <a:ln>
-            <a:noFill/>
-          </a:ln>
-          <a:extLst>
-            <a:ext uri="{909E8E84-426E-40DD-AFC4-6F175D3DCCD1}">
-              <a14:hiddenFill xmlns:a14="http://schemas.microsoft.com/office/drawing/2010/main">
-                <a:solidFill>
-                  <a:schemeClr val="accent1"/>
-                </a:solidFill>
-              </a14:hiddenFill>
-            </a:ext>
-            <a:ext uri="{91240B29-F687-4F45-9708-019B960494DF}">
-              <a14:hiddenLine xmlns:a14="http://schemas.microsoft.com/office/drawing/2010/main" w="9525">
-                <a:solidFill>
-                  <a:schemeClr val="tx1"/>
-                </a:solidFill>
-                <a:miter lim="800000"/>
-                <a:headEnd/>
-                <a:tailEnd/>
-              </a14:hiddenLine>
-            </a:ext>
-          </a:extLst>
-        </p:spPr>
-      </p:pic>
-      <p:pic>
-        <p:nvPicPr>
-          <p:cNvPr id="1027" name="Picture 3"/>
-          <p:cNvPicPr>
-            <a:picLocks noChangeAspect="1" noChangeArrowheads="1"/>
-          </p:cNvPicPr>
-          <p:nvPr/>
-        </p:nvPicPr>
-        <p:blipFill rotWithShape="1">
-          <a:blip r:embed="rId4">
-            <a:extLst>
-              <a:ext uri="{28A0092B-C50C-407E-A947-70E740481C1C}">
-                <a14:useLocalDpi xmlns:a14="http://schemas.microsoft.com/office/drawing/2010/main" val="0"/>
-              </a:ext>
-            </a:extLst>
-          </a:blip>
-          <a:srcRect l="52664" t="28125" r="20982" b="10417"/>
-          <a:stretch/>
-        </p:blipFill>
-        <p:spPr bwMode="auto">
-          <a:xfrm>
-            <a:off x="4381500" y="1834662"/>
-            <a:ext cx="3429000" cy="4495800"/>
-          </a:xfrm>
-          <a:prstGeom prst="rect">
-            <a:avLst/>
-          </a:prstGeom>
-          <a:noFill/>
-          <a:ln>
-            <a:noFill/>
-          </a:ln>
-          <a:extLst>
-            <a:ext uri="{909E8E84-426E-40DD-AFC4-6F175D3DCCD1}">
-              <a14:hiddenFill xmlns:a14="http://schemas.microsoft.com/office/drawing/2010/main">
-                <a:solidFill>
-                  <a:schemeClr val="accent1"/>
-                </a:solidFill>
-              </a14:hiddenFill>
-            </a:ext>
-            <a:ext uri="{91240B29-F687-4F45-9708-019B960494DF}">
-              <a14:hiddenLine xmlns:a14="http://schemas.microsoft.com/office/drawing/2010/main" w="9525">
-                <a:solidFill>
-                  <a:schemeClr val="tx1"/>
-                </a:solidFill>
-                <a:miter lim="800000"/>
-                <a:headEnd/>
-                <a:tailEnd/>
-              </a14:hiddenLine>
-            </a:ext>
-          </a:extLst>
-        </p:spPr>
-      </p:pic>
-      <p:sp>
-        <p:nvSpPr>
-          <p:cNvPr id="3" name="TextBox 2">
-            <a:extLst>
-              <a:ext uri="{FF2B5EF4-FFF2-40B4-BE49-F238E27FC236}">
-                <a16:creationId xmlns:a16="http://schemas.microsoft.com/office/drawing/2014/main" id="{901E2449-3FAD-D64D-9CC8-71D739F120F5}"/>
-              </a:ext>
-            </a:extLst>
-          </p:cNvPr>
-          <p:cNvSpPr txBox="1"/>
-          <p:nvPr/>
         </p:nvSpPr>
         <p:spPr>
           <a:xfrm>
-            <a:off x="7971692" y="1048306"/>
-            <a:ext cx="3860096" cy="369332"/>
+            <a:off x="0" y="274638"/>
+            <a:ext cx="10972800" cy="1143000"/>
           </a:xfrm>
-          <a:prstGeom prst="rect">
-            <a:avLst/>
-          </a:prstGeom>
-          <a:noFill/>
         </p:spPr>
-        <p:txBody>
-          <a:bodyPr wrap="none" rtlCol="0">
-            <a:spAutoFit/>
-          </a:bodyPr>
-          <a:lstStyle/>
-          <a:p>
-            <a:r>
-              <a:rPr lang="en-GB" dirty="0">
-                <a:hlinkClick r:id="rId5"/>
-              </a:rPr>
-              <a:t>https://</a:t>
-            </a:r>
-            <a:r>
-              <a:rPr lang="en-GB" dirty="0" err="1">
-                <a:hlinkClick r:id="rId5"/>
-              </a:rPr>
-              <a:t>library.wit.ie</a:t>
-            </a:r>
-            <a:r>
-              <a:rPr lang="en-GB" dirty="0">
-                <a:hlinkClick r:id="rId5"/>
-              </a:rPr>
-              <a:t>/Resources/</a:t>
-            </a:r>
-            <a:r>
-              <a:rPr lang="en-GB" dirty="0" err="1">
-                <a:hlinkClick r:id="rId5"/>
-              </a:rPr>
-              <a:t>ebooks</a:t>
-            </a:r>
-            <a:endParaRPr lang="en-GB" dirty="0"/>
-          </a:p>
-        </p:txBody>
-      </p:sp>
-      <p:pic>
-        <p:nvPicPr>
-          <p:cNvPr id="4" name="Picture 2" descr="Learning Processing : A Beginner's Guide to Programming Images, Animation, and Interaction Cover Image">
-            <a:extLst>
-              <a:ext uri="{FF2B5EF4-FFF2-40B4-BE49-F238E27FC236}">
-                <a16:creationId xmlns:a16="http://schemas.microsoft.com/office/drawing/2014/main" id="{7F4C2ADC-2F10-B849-BA28-E0E2CC50680A}"/>
-              </a:ext>
-            </a:extLst>
-          </p:cNvPr>
-          <p:cNvPicPr>
-            <a:picLocks noChangeAspect="1" noChangeArrowheads="1"/>
-          </p:cNvPicPr>
-          <p:nvPr/>
-        </p:nvPicPr>
-        <p:blipFill>
-          <a:blip r:embed="rId6">
-            <a:extLst>
-              <a:ext uri="{28A0092B-C50C-407E-A947-70E740481C1C}">
-                <a14:useLocalDpi xmlns:a14="http://schemas.microsoft.com/office/drawing/2010/main" val="0"/>
-              </a:ext>
-            </a:extLst>
-          </a:blip>
-          <a:srcRect/>
-          <a:stretch>
-            <a:fillRect/>
-          </a:stretch>
-        </p:blipFill>
-        <p:spPr bwMode="auto">
-          <a:xfrm>
-            <a:off x="8077624" y="1828800"/>
-            <a:ext cx="3648231" cy="4495800"/>
-          </a:xfrm>
-          <a:prstGeom prst="rect">
-            <a:avLst/>
-          </a:prstGeom>
-          <a:noFill/>
-          <a:extLst>
-            <a:ext uri="{909E8E84-426E-40DD-AFC4-6F175D3DCCD1}">
-              <a14:hiddenFill xmlns:a14="http://schemas.microsoft.com/office/drawing/2010/main">
-                <a:solidFill>
-                  <a:srgbClr val="FFFFFF"/>
-                </a:solidFill>
-              </a14:hiddenFill>
-            </a:ext>
-          </a:extLst>
-        </p:spPr>
-      </p:pic>
-    </p:spTree>
-    <p:extLst>
-      <p:ext uri="{BB962C8B-B14F-4D97-AF65-F5344CB8AC3E}">
-        <p14:creationId xmlns:p14="http://schemas.microsoft.com/office/powerpoint/2010/main" val="3490786750"/>
-      </p:ext>
-    </p:extLst>
-  </p:cSld>
-  <p:clrMapOvr>
-    <a:overrideClrMapping bg1="lt1" tx1="dk1" bg2="lt2" tx2="dk2" accent1="accent1" accent2="accent2" accent3="accent3" accent4="accent4" accent5="accent5" accent6="accent6" hlink="hlink" folHlink="folHlink"/>
-  </p:clrMapOvr>
-</p:sld>
-</file>
-
-<file path=ppt/slides/slide14.xml><?xml version="1.0" encoding="utf-8"?>
-<p:sld xmlns:a="http://schemas.openxmlformats.org/drawingml/2006/main" xmlns:r="http://schemas.openxmlformats.org/officeDocument/2006/relationships" xmlns:p="http://schemas.openxmlformats.org/presentationml/2006/main">
-  <p:cSld>
-    <p:spTree>
-      <p:nvGrpSpPr>
-        <p:cNvPr id="1" name=""/>
-        <p:cNvGrpSpPr/>
-        <p:nvPr/>
-      </p:nvGrpSpPr>
-      <p:grpSpPr>
-        <a:xfrm>
-          <a:off x="0" y="0"/>
-          <a:ext cx="0" cy="0"/>
-          <a:chOff x="0" y="0"/>
-          <a:chExt cx="0" cy="0"/>
-        </a:xfrm>
-      </p:grpSpPr>
-      <p:sp>
-        <p:nvSpPr>
-          <p:cNvPr id="2" name="Title 1">
-            <a:extLst>
-              <a:ext uri="{FF2B5EF4-FFF2-40B4-BE49-F238E27FC236}">
-                <a16:creationId xmlns:a16="http://schemas.microsoft.com/office/drawing/2014/main" id="{1D09B2BD-DCC5-F947-9C8D-04335841928D}"/>
-              </a:ext>
-            </a:extLst>
-          </p:cNvPr>
-          <p:cNvSpPr>
-            <a:spLocks noGrp="1"/>
-          </p:cNvSpPr>
-          <p:nvPr>
-            <p:ph type="title"/>
-          </p:nvPr>
-        </p:nvSpPr>
-        <p:spPr/>
-        <p:txBody>
-          <a:bodyPr/>
-          <a:lstStyle/>
-          <a:p>
-            <a:r>
-              <a:rPr lang="en-GB" dirty="0"/>
-              <a:t>Processing Books</a:t>
-            </a:r>
-          </a:p>
-        </p:txBody>
-      </p:sp>
-      <p:sp>
-        <p:nvSpPr>
-          <p:cNvPr id="3" name="Content Placeholder 2">
-            <a:extLst>
-              <a:ext uri="{FF2B5EF4-FFF2-40B4-BE49-F238E27FC236}">
-                <a16:creationId xmlns:a16="http://schemas.microsoft.com/office/drawing/2014/main" id="{CEC9CBD7-558F-5147-95FF-1CD871F314D2}"/>
-              </a:ext>
-            </a:extLst>
-          </p:cNvPr>
-          <p:cNvSpPr>
-            <a:spLocks noGrp="1"/>
-          </p:cNvSpPr>
-          <p:nvPr>
-            <p:ph idx="1"/>
-          </p:nvPr>
-        </p:nvSpPr>
-        <p:spPr/>
-        <p:txBody>
-          <a:bodyPr/>
-          <a:lstStyle/>
-          <a:p>
-            <a:endParaRPr lang="en-GB" dirty="0"/>
-          </a:p>
-        </p:txBody>
-      </p:sp>
-      <p:sp>
-        <p:nvSpPr>
-          <p:cNvPr id="4" name="Rectangle 3">
-            <a:extLst>
-              <a:ext uri="{FF2B5EF4-FFF2-40B4-BE49-F238E27FC236}">
-                <a16:creationId xmlns:a16="http://schemas.microsoft.com/office/drawing/2014/main" id="{C4B96AC1-7EF6-3A4A-A243-91A98AA00044}"/>
-              </a:ext>
-            </a:extLst>
-          </p:cNvPr>
-          <p:cNvSpPr/>
-          <p:nvPr/>
-        </p:nvSpPr>
-        <p:spPr>
-          <a:xfrm>
-            <a:off x="8763000" y="954922"/>
-            <a:ext cx="3014671" cy="369332"/>
-          </a:xfrm>
-          <a:prstGeom prst="rect">
-            <a:avLst/>
-          </a:prstGeom>
-        </p:spPr>
-        <p:txBody>
-          <a:bodyPr wrap="none">
-            <a:spAutoFit/>
-          </a:bodyPr>
-          <a:lstStyle/>
-          <a:p>
-            <a:r>
-              <a:rPr lang="en-GB" dirty="0">
-                <a:hlinkClick r:id="rId2"/>
-              </a:rPr>
-              <a:t>https://</a:t>
-            </a:r>
-            <a:r>
-              <a:rPr lang="en-GB" dirty="0" err="1">
-                <a:hlinkClick r:id="rId2"/>
-              </a:rPr>
-              <a:t>processing.org</a:t>
-            </a:r>
-            <a:r>
-              <a:rPr lang="en-GB" dirty="0">
-                <a:hlinkClick r:id="rId2"/>
-              </a:rPr>
-              <a:t>/books/</a:t>
-            </a:r>
-            <a:endParaRPr lang="en-GB" dirty="0"/>
-          </a:p>
-        </p:txBody>
-      </p:sp>
-      <p:pic>
-        <p:nvPicPr>
-          <p:cNvPr id="2050" name="Picture 2" descr="Processing: A Programming Handbook for Visual Designers (Second Edition)">
-            <a:extLst>
-              <a:ext uri="{FF2B5EF4-FFF2-40B4-BE49-F238E27FC236}">
-                <a16:creationId xmlns:a16="http://schemas.microsoft.com/office/drawing/2014/main" id="{4D531443-05A9-614A-8AF9-B710A13FF824}"/>
-              </a:ext>
-            </a:extLst>
-          </p:cNvPr>
-          <p:cNvPicPr>
-            <a:picLocks noChangeAspect="1" noChangeArrowheads="1"/>
-          </p:cNvPicPr>
-          <p:nvPr/>
-        </p:nvPicPr>
-        <p:blipFill>
-          <a:blip r:embed="rId3">
-            <a:extLst>
-              <a:ext uri="{28A0092B-C50C-407E-A947-70E740481C1C}">
-                <a14:useLocalDpi xmlns:a14="http://schemas.microsoft.com/office/drawing/2010/main" val="0"/>
-              </a:ext>
-            </a:extLst>
-          </a:blip>
-          <a:srcRect/>
-          <a:stretch>
-            <a:fillRect/>
-          </a:stretch>
-        </p:blipFill>
-        <p:spPr bwMode="auto">
-          <a:xfrm>
-            <a:off x="609600" y="1600201"/>
-            <a:ext cx="3429000" cy="4526280"/>
-          </a:xfrm>
-          <a:prstGeom prst="rect">
-            <a:avLst/>
-          </a:prstGeom>
-          <a:noFill/>
-          <a:extLst>
-            <a:ext uri="{909E8E84-426E-40DD-AFC4-6F175D3DCCD1}">
-              <a14:hiddenFill xmlns:a14="http://schemas.microsoft.com/office/drawing/2010/main">
-                <a:solidFill>
-                  <a:srgbClr val="FFFFFF"/>
-                </a:solidFill>
-              </a14:hiddenFill>
-            </a:ext>
-          </a:extLst>
-        </p:spPr>
-      </p:pic>
-      <p:pic>
-        <p:nvPicPr>
-          <p:cNvPr id="2052" name="Picture 4" descr="Processing: Creative Coding and Generative Art in Processing 2">
-            <a:extLst>
-              <a:ext uri="{FF2B5EF4-FFF2-40B4-BE49-F238E27FC236}">
-                <a16:creationId xmlns:a16="http://schemas.microsoft.com/office/drawing/2014/main" id="{542CAEEC-D415-8541-BCAF-ECF655994E59}"/>
-              </a:ext>
-            </a:extLst>
-          </p:cNvPr>
-          <p:cNvPicPr>
-            <a:picLocks noChangeAspect="1" noChangeArrowheads="1"/>
-          </p:cNvPicPr>
-          <p:nvPr/>
-        </p:nvPicPr>
-        <p:blipFill>
-          <a:blip r:embed="rId4">
-            <a:extLst>
-              <a:ext uri="{28A0092B-C50C-407E-A947-70E740481C1C}">
-                <a14:useLocalDpi xmlns:a14="http://schemas.microsoft.com/office/drawing/2010/main" val="0"/>
-              </a:ext>
-            </a:extLst>
-          </a:blip>
-          <a:srcRect/>
-          <a:stretch>
-            <a:fillRect/>
-          </a:stretch>
-        </p:blipFill>
-        <p:spPr bwMode="auto">
-          <a:xfrm>
-            <a:off x="4251384" y="1599884"/>
-            <a:ext cx="3649969" cy="4525962"/>
-          </a:xfrm>
-          <a:prstGeom prst="rect">
-            <a:avLst/>
-          </a:prstGeom>
-          <a:noFill/>
-          <a:extLst>
-            <a:ext uri="{909E8E84-426E-40DD-AFC4-6F175D3DCCD1}">
-              <a14:hiddenFill xmlns:a14="http://schemas.microsoft.com/office/drawing/2010/main">
-                <a:solidFill>
-                  <a:srgbClr val="FFFFFF"/>
-                </a:solidFill>
-              </a14:hiddenFill>
-            </a:ext>
-          </a:extLst>
-        </p:spPr>
-      </p:pic>
-      <p:pic>
-        <p:nvPicPr>
-          <p:cNvPr id="2054" name="Picture 6" descr="Processing for Visual Artists: How to Create Expressive Images and Interactive Art">
-            <a:extLst>
-              <a:ext uri="{FF2B5EF4-FFF2-40B4-BE49-F238E27FC236}">
-                <a16:creationId xmlns:a16="http://schemas.microsoft.com/office/drawing/2014/main" id="{2DE94859-DC1C-1240-BF79-50C3C1D0E2A4}"/>
-              </a:ext>
-            </a:extLst>
-          </p:cNvPr>
-          <p:cNvPicPr>
-            <a:picLocks noChangeAspect="1" noChangeArrowheads="1"/>
-          </p:cNvPicPr>
-          <p:nvPr/>
-        </p:nvPicPr>
-        <p:blipFill>
-          <a:blip r:embed="rId5">
-            <a:extLst>
-              <a:ext uri="{28A0092B-C50C-407E-A947-70E740481C1C}">
-                <a14:useLocalDpi xmlns:a14="http://schemas.microsoft.com/office/drawing/2010/main" val="0"/>
-              </a:ext>
-            </a:extLst>
-          </a:blip>
-          <a:srcRect/>
-          <a:stretch>
-            <a:fillRect/>
-          </a:stretch>
-        </p:blipFill>
-        <p:spPr bwMode="auto">
-          <a:xfrm>
-            <a:off x="8018650" y="1599884"/>
-            <a:ext cx="3563750" cy="4525962"/>
-          </a:xfrm>
-          <a:prstGeom prst="rect">
-            <a:avLst/>
-          </a:prstGeom>
-          <a:noFill/>
-          <a:extLst>
-            <a:ext uri="{909E8E84-426E-40DD-AFC4-6F175D3DCCD1}">
-              <a14:hiddenFill xmlns:a14="http://schemas.microsoft.com/office/drawing/2010/main">
-                <a:solidFill>
-                  <a:srgbClr val="FFFFFF"/>
-                </a:solidFill>
-              </a14:hiddenFill>
-            </a:ext>
-          </a:extLst>
-        </p:spPr>
-      </p:pic>
-    </p:spTree>
-    <p:extLst>
-      <p:ext uri="{BB962C8B-B14F-4D97-AF65-F5344CB8AC3E}">
-        <p14:creationId xmlns:p14="http://schemas.microsoft.com/office/powerpoint/2010/main" val="139426567"/>
-      </p:ext>
-    </p:extLst>
-  </p:cSld>
-  <p:clrMapOvr>
-    <a:masterClrMapping/>
-  </p:clrMapOvr>
-</p:sld>
-</file>
-
-<file path=ppt/slides/slide15.xml><?xml version="1.0" encoding="utf-8"?>
-<p:sld xmlns:a="http://schemas.openxmlformats.org/drawingml/2006/main" xmlns:r="http://schemas.openxmlformats.org/officeDocument/2006/relationships" xmlns:p="http://schemas.openxmlformats.org/presentationml/2006/main">
-  <p:cSld>
-    <p:spTree>
-      <p:nvGrpSpPr>
-        <p:cNvPr id="1" name=""/>
-        <p:cNvGrpSpPr/>
-        <p:nvPr/>
-      </p:nvGrpSpPr>
-      <p:grpSpPr>
-        <a:xfrm>
-          <a:off x="0" y="0"/>
-          <a:ext cx="0" cy="0"/>
-          <a:chOff x="0" y="0"/>
-          <a:chExt cx="0" cy="0"/>
-        </a:xfrm>
-      </p:grpSpPr>
-      <p:sp>
-        <p:nvSpPr>
-          <p:cNvPr id="2" name="Title 1"/>
-          <p:cNvSpPr>
-            <a:spLocks noGrp="1"/>
-          </p:cNvSpPr>
-          <p:nvPr>
-            <p:ph type="title"/>
-          </p:nvPr>
-        </p:nvSpPr>
-        <p:spPr/>
         <p:txBody>
           <a:bodyPr/>
           <a:lstStyle/>
@@ -16427,7 +15996,7 @@
           <p:nvPr/>
         </p:nvPicPr>
         <p:blipFill>
-          <a:blip r:embed="rId2">
+          <a:blip r:embed="rId3">
             <a:extLst>
               <a:ext uri="{28A0092B-C50C-407E-A947-70E740481C1C}">
                 <a14:useLocalDpi xmlns:a14="http://schemas.microsoft.com/office/drawing/2010/main" val="0"/>
@@ -16467,7 +16036,7 @@
     </p:extLst>
   </p:cSld>
   <p:clrMapOvr>
-    <a:masterClrMapping/>
+    <a:overrideClrMapping bg1="lt1" tx1="dk1" bg2="lt2" tx2="dk2" accent1="accent1" accent2="accent2" accent3="accent3" accent4="accent4" accent5="accent5" accent6="accent6" hlink="hlink" folHlink="folHlink"/>
   </p:clrMapOvr>
 </p:sld>
 </file>
@@ -16860,132 +16429,6 @@
       </p:grpSpPr>
       <p:sp>
         <p:nvSpPr>
-          <p:cNvPr id="245" name="Shape 245"/>
-          <p:cNvSpPr>
-            <a:spLocks noGrp="1"/>
-          </p:cNvSpPr>
-          <p:nvPr>
-            <p:ph type="title"/>
-          </p:nvPr>
-        </p:nvSpPr>
-        <p:spPr>
-          <a:xfrm>
-            <a:off x="1803662" y="4535875"/>
-            <a:ext cx="8584676" cy="1044301"/>
-          </a:xfrm>
-          <a:prstGeom prst="rect">
-            <a:avLst/>
-          </a:prstGeom>
-        </p:spPr>
-        <p:txBody>
-          <a:bodyPr vert="horz" lIns="91440" tIns="45720" rIns="91440" bIns="45720" rtlCol="0" anchor="t">
-            <a:normAutofit/>
-          </a:bodyPr>
-          <a:lstStyle/>
-          <a:p>
-            <a:pPr algn="ctr">
-              <a:lnSpc>
-                <a:spcPct val="90000"/>
-              </a:lnSpc>
-            </a:pPr>
-            <a:r>
-              <a:rPr lang="en-US" sz="4800" dirty="0">
-                <a:solidFill>
-                  <a:schemeClr val="tx1"/>
-                </a:solidFill>
-              </a:rPr>
-              <a:t>Programming Technologies</a:t>
-            </a:r>
-          </a:p>
-        </p:txBody>
-      </p:sp>
-      <p:pic>
-        <p:nvPicPr>
-          <p:cNvPr id="3074" name="Picture 2" descr="Image result for java">
-            <a:extLst>
-              <a:ext uri="{FF2B5EF4-FFF2-40B4-BE49-F238E27FC236}">
-                <a16:creationId xmlns:a16="http://schemas.microsoft.com/office/drawing/2014/main" id="{667526F7-82EB-4E1F-BEA3-BC94D2CEAE2D}"/>
-              </a:ext>
-            </a:extLst>
-          </p:cNvPr>
-          <p:cNvPicPr>
-            <a:picLocks noChangeAspect="1" noChangeArrowheads="1"/>
-          </p:cNvPicPr>
-          <p:nvPr/>
-        </p:nvPicPr>
-        <p:blipFill>
-          <a:blip r:embed="rId4" cstate="print">
-            <a:extLst>
-              <a:ext uri="{28A0092B-C50C-407E-A947-70E740481C1C}">
-                <a14:useLocalDpi xmlns:a14="http://schemas.microsoft.com/office/drawing/2010/main" val="0"/>
-              </a:ext>
-            </a:extLst>
-          </a:blip>
-          <a:srcRect/>
-          <a:stretch>
-            <a:fillRect/>
-          </a:stretch>
-        </p:blipFill>
-        <p:spPr bwMode="auto">
-          <a:xfrm>
-            <a:off x="8891793" y="1564075"/>
-            <a:ext cx="1837944" cy="1837944"/>
-          </a:xfrm>
-          <a:prstGeom prst="rect">
-            <a:avLst/>
-          </a:prstGeom>
-          <a:noFill/>
-          <a:extLst>
-            <a:ext uri="{909E8E84-426E-40DD-AFC4-6F175D3DCCD1}">
-              <a14:hiddenFill xmlns:a14="http://schemas.microsoft.com/office/drawing/2010/main">
-                <a:solidFill>
-                  <a:srgbClr val="FFFFFF"/>
-                </a:solidFill>
-              </a14:hiddenFill>
-            </a:ext>
-          </a:extLst>
-        </p:spPr>
-      </p:pic>
-    </p:spTree>
-    <p:extLst>
-      <p:ext uri="{BB962C8B-B14F-4D97-AF65-F5344CB8AC3E}">
-        <p14:creationId xmlns:p14="http://schemas.microsoft.com/office/powerpoint/2010/main" val="233102251"/>
-      </p:ext>
-    </p:extLst>
-  </p:cSld>
-  <p:clrMapOvr>
-    <a:overrideClrMapping bg1="lt1" tx1="dk1" bg2="lt2" tx2="dk2" accent1="accent1" accent2="accent2" accent3="accent3" accent4="accent4" accent5="accent5" accent6="accent6" hlink="hlink" folHlink="folHlink"/>
-  </p:clrMapOvr>
-</p:sld>
-</file>
-
-<file path=ppt/slides/slide5.xml><?xml version="1.0" encoding="utf-8"?>
-<p:sld xmlns:a="http://schemas.openxmlformats.org/drawingml/2006/main" xmlns:r="http://schemas.openxmlformats.org/officeDocument/2006/relationships" xmlns:p="http://schemas.openxmlformats.org/presentationml/2006/main">
-  <p:cSld>
-    <p:bg>
-      <p:bgPr>
-        <a:solidFill>
-          <a:srgbClr val="C1C1C1"/>
-        </a:solidFill>
-        <a:effectLst/>
-      </p:bgPr>
-    </p:bg>
-    <p:spTree>
-      <p:nvGrpSpPr>
-        <p:cNvPr id="1" name=""/>
-        <p:cNvGrpSpPr/>
-        <p:nvPr/>
-      </p:nvGrpSpPr>
-      <p:grpSpPr>
-        <a:xfrm>
-          <a:off x="0" y="0"/>
-          <a:ext cx="0" cy="0"/>
-          <a:chOff x="0" y="0"/>
-          <a:chExt cx="0" cy="0"/>
-        </a:xfrm>
-      </p:grpSpPr>
-      <p:sp>
-        <p:nvSpPr>
           <p:cNvPr id="9" name="Oval 8">
             <a:extLst>
               <a:ext uri="{FF2B5EF4-FFF2-40B4-BE49-F238E27FC236}">
@@ -17213,7 +16656,7 @@
 </p:sld>
 </file>
 
-<file path=ppt/slides/slide6.xml><?xml version="1.0" encoding="utf-8"?>
+<file path=ppt/slides/slide5.xml><?xml version="1.0" encoding="utf-8"?>
 <p:sld xmlns:a="http://schemas.openxmlformats.org/drawingml/2006/main" xmlns:r="http://schemas.openxmlformats.org/officeDocument/2006/relationships" xmlns:p="http://schemas.openxmlformats.org/presentationml/2006/main">
   <p:cSld>
     <p:bg>
@@ -17331,7 +16774,7 @@
 </p:sld>
 </file>
 
-<file path=ppt/slides/slide7.xml><?xml version="1.0" encoding="utf-8"?>
+<file path=ppt/slides/slide6.xml><?xml version="1.0" encoding="utf-8"?>
 <p:sld xmlns:a="http://schemas.openxmlformats.org/drawingml/2006/main" xmlns:r="http://schemas.openxmlformats.org/officeDocument/2006/relationships" xmlns:p="http://schemas.openxmlformats.org/presentationml/2006/main">
   <p:cSld>
     <p:bg>
@@ -17397,7 +16840,7 @@
           <a:p>
             <a:fld id="{86CB4B4D-7CA3-9044-876B-883B54F8677D}" type="slidenum">
               <a:rPr lang="en-IE" smtClean="0"/>
-              <a:t>7</a:t>
+              <a:t>6</a:t>
             </a:fld>
             <a:endParaRPr lang="en-IE"/>
           </a:p>
@@ -17438,7 +16881,7 @@
 </p:sld>
 </file>
 
-<file path=ppt/slides/slide8.xml><?xml version="1.0" encoding="utf-8"?>
+<file path=ppt/slides/slide7.xml><?xml version="1.0" encoding="utf-8"?>
 <p:sld xmlns:a="http://schemas.openxmlformats.org/drawingml/2006/main" xmlns:r="http://schemas.openxmlformats.org/officeDocument/2006/relationships" xmlns:p="http://schemas.openxmlformats.org/presentationml/2006/main">
   <p:cSld>
     <p:bg>
@@ -17584,7 +17027,7 @@
           <a:p>
             <a:fld id="{86CB4B4D-7CA3-9044-876B-883B54F8677D}" type="slidenum">
               <a:rPr lang="en-IE" smtClean="0"/>
-              <a:t>8</a:t>
+              <a:t>7</a:t>
             </a:fld>
             <a:endParaRPr lang="en-IE"/>
           </a:p>
@@ -17603,7 +17046,7 @@
 </p:sld>
 </file>
 
-<file path=ppt/slides/slide9.xml><?xml version="1.0" encoding="utf-8"?>
+<file path=ppt/slides/slide8.xml><?xml version="1.0" encoding="utf-8"?>
 <p:sld xmlns:a="http://schemas.openxmlformats.org/drawingml/2006/main" xmlns:r="http://schemas.openxmlformats.org/officeDocument/2006/relationships" xmlns:p="http://schemas.openxmlformats.org/presentationml/2006/main">
   <p:cSld>
     <p:bg>
@@ -17728,6 +17171,202 @@
     <p:extLst>
       <p:ext uri="{BB962C8B-B14F-4D97-AF65-F5344CB8AC3E}">
         <p14:creationId xmlns:p14="http://schemas.microsoft.com/office/powerpoint/2010/main" val="379983282"/>
+      </p:ext>
+    </p:extLst>
+  </p:cSld>
+  <p:clrMapOvr>
+    <a:overrideClrMapping bg1="lt1" tx1="dk1" bg2="lt2" tx2="dk2" accent1="accent1" accent2="accent2" accent3="accent3" accent4="accent4" accent5="accent5" accent6="accent6" hlink="hlink" folHlink="folHlink"/>
+  </p:clrMapOvr>
+</p:sld>
+</file>
+
+<file path=ppt/slides/slide9.xml><?xml version="1.0" encoding="utf-8"?>
+<p:sld xmlns:a="http://schemas.openxmlformats.org/drawingml/2006/main" xmlns:r="http://schemas.openxmlformats.org/officeDocument/2006/relationships" xmlns:p="http://schemas.openxmlformats.org/presentationml/2006/main">
+  <p:cSld>
+    <p:bg>
+      <p:bgPr>
+        <a:solidFill>
+          <a:srgbClr val="C1C1C1"/>
+        </a:solidFill>
+        <a:effectLst/>
+      </p:bgPr>
+    </p:bg>
+    <p:spTree>
+      <p:nvGrpSpPr>
+        <p:cNvPr id="1" name=""/>
+        <p:cNvGrpSpPr/>
+        <p:nvPr/>
+      </p:nvGrpSpPr>
+      <p:grpSpPr>
+        <a:xfrm>
+          <a:off x="0" y="0"/>
+          <a:ext cx="0" cy="0"/>
+          <a:chOff x="0" y="0"/>
+          <a:chExt cx="0" cy="0"/>
+        </a:xfrm>
+      </p:grpSpPr>
+      <p:sp>
+        <p:nvSpPr>
+          <p:cNvPr id="2" name="Title 1"/>
+          <p:cNvSpPr>
+            <a:spLocks noGrp="1"/>
+          </p:cNvSpPr>
+          <p:nvPr>
+            <p:ph type="title"/>
+          </p:nvPr>
+        </p:nvSpPr>
+        <p:spPr/>
+        <p:txBody>
+          <a:bodyPr/>
+          <a:lstStyle/>
+          <a:p>
+            <a:r>
+              <a:rPr lang="en-IE" dirty="0"/>
+              <a:t>What is </a:t>
+            </a:r>
+            <a:r>
+              <a:rPr lang="en-IE"/>
+              <a:t>BlueJ?</a:t>
+            </a:r>
+            <a:endParaRPr lang="en-IE" dirty="0"/>
+          </a:p>
+        </p:txBody>
+      </p:sp>
+      <p:pic>
+        <p:nvPicPr>
+          <p:cNvPr id="6" name="Picture 5">
+            <a:extLst>
+              <a:ext uri="{FF2B5EF4-FFF2-40B4-BE49-F238E27FC236}">
+                <a16:creationId xmlns:a16="http://schemas.microsoft.com/office/drawing/2014/main" id="{5A494C72-5714-AE54-67F1-A0C6FD01ADD6}"/>
+              </a:ext>
+            </a:extLst>
+          </p:cNvPr>
+          <p:cNvPicPr>
+            <a:picLocks noChangeAspect="1"/>
+          </p:cNvPicPr>
+          <p:nvPr/>
+        </p:nvPicPr>
+        <p:blipFill>
+          <a:blip r:embed="rId3"/>
+          <a:stretch>
+            <a:fillRect/>
+          </a:stretch>
+        </p:blipFill>
+        <p:spPr>
+          <a:xfrm>
+            <a:off x="9878291" y="137444"/>
+            <a:ext cx="1676400" cy="1280194"/>
+          </a:xfrm>
+          <a:prstGeom prst="rect">
+            <a:avLst/>
+          </a:prstGeom>
+        </p:spPr>
+      </p:pic>
+      <p:sp>
+        <p:nvSpPr>
+          <p:cNvPr id="7" name="TextBox 6">
+            <a:extLst>
+              <a:ext uri="{FF2B5EF4-FFF2-40B4-BE49-F238E27FC236}">
+                <a16:creationId xmlns:a16="http://schemas.microsoft.com/office/drawing/2014/main" id="{7E7E6DE8-49BB-9643-364C-227D13C13D23}"/>
+              </a:ext>
+            </a:extLst>
+          </p:cNvPr>
+          <p:cNvSpPr txBox="1"/>
+          <p:nvPr/>
+        </p:nvSpPr>
+        <p:spPr>
+          <a:xfrm>
+            <a:off x="637572" y="1533612"/>
+            <a:ext cx="9890567" cy="5447645"/>
+          </a:xfrm>
+          <a:prstGeom prst="rect">
+            <a:avLst/>
+          </a:prstGeom>
+          <a:noFill/>
+        </p:spPr>
+        <p:txBody>
+          <a:bodyPr wrap="square">
+            <a:spAutoFit/>
+          </a:bodyPr>
+          <a:lstStyle/>
+          <a:p>
+            <a:pPr>
+              <a:buNone/>
+            </a:pPr>
+            <a:r>
+              <a:rPr lang="en-IE" sz="3200" b="1" dirty="0" err="1"/>
+              <a:t>BlueJ</a:t>
+            </a:r>
+            <a:r>
+              <a:rPr lang="en-IE" sz="3200" b="1" dirty="0"/>
+              <a:t> </a:t>
+            </a:r>
+            <a:r>
+              <a:rPr lang="en-IE" sz="3200" dirty="0"/>
+              <a:t>is a simple program you’ll use to learn Java. It’s designed for beginners, so it avoids the clutter of professional coding tools and lets you focus on the basics.</a:t>
+            </a:r>
+          </a:p>
+          <a:p>
+            <a:pPr lvl="1">
+              <a:buFont typeface="Arial" panose="020B0604020202020204" pitchFamily="34" charset="0"/>
+              <a:buChar char="•"/>
+            </a:pPr>
+            <a:r>
+              <a:rPr lang="en-IE" sz="2800" dirty="0"/>
+              <a:t>You’ll see your program as boxes (classes) that you can click on.</a:t>
+            </a:r>
+          </a:p>
+          <a:p>
+            <a:pPr lvl="1">
+              <a:buFont typeface="Arial" panose="020B0604020202020204" pitchFamily="34" charset="0"/>
+              <a:buChar char="•"/>
+            </a:pPr>
+            <a:r>
+              <a:rPr lang="en-IE" sz="2800" dirty="0"/>
+              <a:t>You can create objects and test what they can do without writing extra code.</a:t>
+            </a:r>
+          </a:p>
+          <a:p>
+            <a:pPr lvl="1">
+              <a:buFont typeface="Arial" panose="020B0604020202020204" pitchFamily="34" charset="0"/>
+              <a:buChar char="•"/>
+            </a:pPr>
+            <a:r>
+              <a:rPr lang="en-IE" sz="2800" dirty="0"/>
+              <a:t>The editor helps you write neatly and spot mistakes more easily.</a:t>
+            </a:r>
+          </a:p>
+          <a:p>
+            <a:pPr lvl="1">
+              <a:buFont typeface="Arial" panose="020B0604020202020204" pitchFamily="34" charset="0"/>
+              <a:buChar char="•"/>
+            </a:pPr>
+            <a:r>
+              <a:rPr lang="en-IE" sz="2800" dirty="0"/>
+              <a:t>It’s free and works on most computers.</a:t>
+            </a:r>
+          </a:p>
+          <a:p>
+            <a:pPr lvl="1"/>
+            <a:r>
+              <a:rPr lang="en-IE" sz="2800" dirty="0"/>
+              <a:t>Think of </a:t>
+            </a:r>
+            <a:r>
+              <a:rPr lang="en-IE" sz="2800" dirty="0" err="1"/>
+              <a:t>BlueJ</a:t>
+            </a:r>
+            <a:r>
+              <a:rPr lang="en-IE" sz="2800" dirty="0"/>
+              <a:t> as training wheels for Java: it helps you experiment, see results quickly, and understand the core ideas of programming.</a:t>
+            </a:r>
+          </a:p>
+        </p:txBody>
+      </p:sp>
+    </p:spTree>
+    <p:extLst>
+      <p:ext uri="{BB962C8B-B14F-4D97-AF65-F5344CB8AC3E}">
+        <p14:creationId xmlns:p14="http://schemas.microsoft.com/office/powerpoint/2010/main" val="3041990600"/>
       </p:ext>
     </p:extLst>
   </p:cSld>

--- a/topic00-induction/unit-1/talk-1/a-intro-to-programming.pptx
+++ b/topic00-induction/unit-1/talk-1/a-intro-to-programming.pptx
@@ -10786,7 +10786,7 @@
           <a:p>
             <a:fld id="{58C3D141-1E1C-433C-AD3A-CD56CBBB4F9F}" type="datetimeFigureOut">
               <a:rPr lang="en-IE" smtClean="0"/>
-              <a:t>09/09/2025</a:t>
+              <a:t>12/09/2025</a:t>
             </a:fld>
             <a:endParaRPr lang="en-IE"/>
           </a:p>
@@ -11658,7 +11658,7 @@
             <a:fld id="{1D8BD707-D9CF-40AE-B4C6-C98DA3205C09}" type="datetimeFigureOut">
               <a:rPr lang="en-US" smtClean="0"/>
               <a:pPr/>
-              <a:t>9/9/25</a:t>
+              <a:t>9/12/25</a:t>
             </a:fld>
             <a:endParaRPr lang="en-US"/>
           </a:p>
@@ -11830,7 +11830,7 @@
             <a:fld id="{1D8BD707-D9CF-40AE-B4C6-C98DA3205C09}" type="datetimeFigureOut">
               <a:rPr lang="en-US" smtClean="0"/>
               <a:pPr/>
-              <a:t>9/9/25</a:t>
+              <a:t>9/12/25</a:t>
             </a:fld>
             <a:endParaRPr lang="en-US"/>
           </a:p>
@@ -12012,7 +12012,7 @@
             <a:fld id="{1D8BD707-D9CF-40AE-B4C6-C98DA3205C09}" type="datetimeFigureOut">
               <a:rPr lang="en-US" smtClean="0"/>
               <a:pPr/>
-              <a:t>9/9/25</a:t>
+              <a:t>9/12/25</a:t>
             </a:fld>
             <a:endParaRPr lang="en-US"/>
           </a:p>
@@ -12325,7 +12325,7 @@
             <a:fld id="{1D8BD707-D9CF-40AE-B4C6-C98DA3205C09}" type="datetimeFigureOut">
               <a:rPr lang="en-US" smtClean="0"/>
               <a:pPr/>
-              <a:t>9/9/25</a:t>
+              <a:t>9/12/25</a:t>
             </a:fld>
             <a:endParaRPr lang="en-US"/>
           </a:p>
@@ -12655,7 +12655,7 @@
             <a:fld id="{1D8BD707-D9CF-40AE-B4C6-C98DA3205C09}" type="datetimeFigureOut">
               <a:rPr lang="en-US" smtClean="0"/>
               <a:pPr/>
-              <a:t>9/9/25</a:t>
+              <a:t>9/12/25</a:t>
             </a:fld>
             <a:endParaRPr lang="en-US"/>
           </a:p>
@@ -12956,7 +12956,7 @@
             <a:fld id="{1D8BD707-D9CF-40AE-B4C6-C98DA3205C09}" type="datetimeFigureOut">
               <a:rPr lang="en-US" smtClean="0"/>
               <a:pPr/>
-              <a:t>9/9/25</a:t>
+              <a:t>9/12/25</a:t>
             </a:fld>
             <a:endParaRPr lang="en-US"/>
           </a:p>
@@ -13463,7 +13463,7 @@
             <a:fld id="{1D8BD707-D9CF-40AE-B4C6-C98DA3205C09}" type="datetimeFigureOut">
               <a:rPr lang="en-US" smtClean="0"/>
               <a:pPr/>
-              <a:t>9/9/25</a:t>
+              <a:t>9/12/25</a:t>
             </a:fld>
             <a:endParaRPr lang="en-US"/>
           </a:p>
@@ -13629,7 +13629,7 @@
             <a:fld id="{1D8BD707-D9CF-40AE-B4C6-C98DA3205C09}" type="datetimeFigureOut">
               <a:rPr lang="en-US" smtClean="0"/>
               <a:pPr/>
-              <a:t>9/9/25</a:t>
+              <a:t>9/12/25</a:t>
             </a:fld>
             <a:endParaRPr lang="en-US"/>
           </a:p>
@@ -13802,7 +13802,7 @@
             <a:fld id="{1D8BD707-D9CF-40AE-B4C6-C98DA3205C09}" type="datetimeFigureOut">
               <a:rPr lang="en-US" smtClean="0"/>
               <a:pPr/>
-              <a:t>9/9/25</a:t>
+              <a:t>9/12/25</a:t>
             </a:fld>
             <a:endParaRPr lang="en-US"/>
           </a:p>
@@ -14081,7 +14081,7 @@
             <a:fld id="{1D8BD707-D9CF-40AE-B4C6-C98DA3205C09}" type="datetimeFigureOut">
               <a:rPr lang="en-US" smtClean="0"/>
               <a:pPr/>
-              <a:t>9/9/25</a:t>
+              <a:t>9/12/25</a:t>
             </a:fld>
             <a:endParaRPr lang="en-US"/>
           </a:p>
@@ -14340,7 +14340,7 @@
             <a:fld id="{1D8BD707-D9CF-40AE-B4C6-C98DA3205C09}" type="datetimeFigureOut">
               <a:rPr lang="en-US" smtClean="0"/>
               <a:pPr/>
-              <a:t>9/9/25</a:t>
+              <a:t>9/12/25</a:t>
             </a:fld>
             <a:endParaRPr lang="en-US"/>
           </a:p>
@@ -14555,7 +14555,7 @@
             <a:fld id="{1D8BD707-D9CF-40AE-B4C6-C98DA3205C09}" type="datetimeFigureOut">
               <a:rPr lang="en-US" smtClean="0"/>
               <a:pPr/>
-              <a:t>9/9/25</a:t>
+              <a:t>9/12/25</a:t>
             </a:fld>
             <a:endParaRPr lang="en-US"/>
           </a:p>
@@ -14921,7 +14921,9 @@
     <p:bg>
       <p:bgPr>
         <a:solidFill>
-          <a:srgbClr val="C1C1C1"/>
+          <a:schemeClr val="bg1">
+            <a:lumMod val="85000"/>
+          </a:schemeClr>
         </a:solidFill>
         <a:effectLst/>
       </p:bgPr>
@@ -15253,7 +15255,9 @@
     <p:bg>
       <p:bgPr>
         <a:solidFill>
-          <a:srgbClr val="C1C1C1"/>
+          <a:schemeClr val="bg1">
+            <a:lumMod val="85000"/>
+          </a:schemeClr>
         </a:solidFill>
         <a:effectLst/>
       </p:bgPr>
@@ -15512,7 +15516,9 @@
     <p:bg>
       <p:bgPr>
         <a:solidFill>
-          <a:srgbClr val="C1C1C1"/>
+          <a:schemeClr val="bg1">
+            <a:lumMod val="85000"/>
+          </a:schemeClr>
         </a:solidFill>
         <a:effectLst/>
       </p:bgPr>
@@ -15668,7 +15674,9 @@
     <p:bg>
       <p:bgPr>
         <a:solidFill>
-          <a:srgbClr val="C1C1C1"/>
+          <a:schemeClr val="bg1">
+            <a:lumMod val="85000"/>
+          </a:schemeClr>
         </a:solidFill>
         <a:effectLst/>
       </p:bgPr>
@@ -15941,7 +15949,9 @@
     <p:bg>
       <p:bgPr>
         <a:solidFill>
-          <a:srgbClr val="C1C1C1"/>
+          <a:schemeClr val="bg1">
+            <a:lumMod val="85000"/>
+          </a:schemeClr>
         </a:solidFill>
         <a:effectLst/>
       </p:bgPr>
@@ -16047,7 +16057,9 @@
     <p:bg>
       <p:bgPr>
         <a:solidFill>
-          <a:srgbClr val="C1C1C1"/>
+          <a:schemeClr val="bg1">
+            <a:lumMod val="85000"/>
+          </a:schemeClr>
         </a:solidFill>
         <a:effectLst/>
       </p:bgPr>
@@ -16229,7 +16241,9 @@
     <p:bg>
       <p:bgPr>
         <a:solidFill>
-          <a:srgbClr val="C1C1C1"/>
+          <a:schemeClr val="bg1">
+            <a:lumMod val="85000"/>
+          </a:schemeClr>
         </a:solidFill>
         <a:effectLst/>
       </p:bgPr>
@@ -16408,7 +16422,9 @@
     <p:bg>
       <p:bgPr>
         <a:solidFill>
-          <a:srgbClr val="C1C1C1"/>
+          <a:schemeClr val="bg1">
+            <a:lumMod val="85000"/>
+          </a:schemeClr>
         </a:solidFill>
         <a:effectLst/>
       </p:bgPr>
@@ -16662,7 +16678,9 @@
     <p:bg>
       <p:bgPr>
         <a:solidFill>
-          <a:srgbClr val="C1C1C1"/>
+          <a:schemeClr val="bg1">
+            <a:lumMod val="85000"/>
+          </a:schemeClr>
         </a:solidFill>
         <a:effectLst/>
       </p:bgPr>
@@ -16780,7 +16798,9 @@
     <p:bg>
       <p:bgPr>
         <a:solidFill>
-          <a:srgbClr val="C1C1C1"/>
+          <a:schemeClr val="bg1">
+            <a:lumMod val="85000"/>
+          </a:schemeClr>
         </a:solidFill>
         <a:effectLst/>
       </p:bgPr>
@@ -16887,7 +16907,9 @@
     <p:bg>
       <p:bgPr>
         <a:solidFill>
-          <a:srgbClr val="C1C1C1"/>
+          <a:schemeClr val="bg1">
+            <a:lumMod val="85000"/>
+          </a:schemeClr>
         </a:solidFill>
         <a:effectLst/>
       </p:bgPr>
@@ -17052,7 +17074,9 @@
     <p:bg>
       <p:bgPr>
         <a:solidFill>
-          <a:srgbClr val="C1C1C1"/>
+          <a:schemeClr val="bg1">
+            <a:lumMod val="85000"/>
+          </a:schemeClr>
         </a:solidFill>
         <a:effectLst/>
       </p:bgPr>
@@ -17186,7 +17210,9 @@
     <p:bg>
       <p:bgPr>
         <a:solidFill>
-          <a:srgbClr val="C1C1C1"/>
+          <a:schemeClr val="bg1">
+            <a:lumMod val="85000"/>
+          </a:schemeClr>
         </a:solidFill>
         <a:effectLst/>
       </p:bgPr>
